--- a/Secret_Inbox_Overview.pptx
+++ b/Secret_Inbox_Overview.pptx
@@ -15,7 +15,7 @@
     <p:sldId id="260" r:id="rId6"/>
     <p:sldId id="261" r:id="rId7"/>
     <p:sldId id="262" r:id="rId8"/>
-    <p:sldId id="263" r:id="rId9"/>
+    <p:sldId id="264" r:id="rId9"/>
   </p:sldIdLst>
   <p:sldSz cx="12192000" cy="6858000"/>
   <p:notesSz cx="6858000" cy="12192000"/>
@@ -1628,7 +1628,7 @@
                 <a:ea typeface="Bookman Old Style" pitchFamily="34" charset="-122"/>
                 <a:cs typeface="Bookman Old Style" pitchFamily="34" charset="-120"/>
               </a:rPr>
-              <a:t>Username Login</a:t>
+              <a:t>Password Login</a:t>
             </a:r>
             <a:endParaRPr lang="en-US" sz="1500" dirty="0"/>
           </a:p>
@@ -1670,7 +1670,7 @@
                 <a:ea typeface="Calibri" pitchFamily="34" charset="-122"/>
                 <a:cs typeface="Calibri" pitchFamily="34" charset="-120"/>
               </a:rPr>
-              <a:t>One-step login or register — no password.</a:t>
+              <a:t>Create an account with a password, then sign in securely.</a:t>
             </a:r>
             <a:endParaRPr lang="en-US" sz="1150" dirty="0"/>
           </a:p>
@@ -1852,7 +1852,7 @@
                 <a:ea typeface="Calibri" pitchFamily="34" charset="-122"/>
                 <a:cs typeface="Calibri" pitchFamily="34" charset="-120"/>
               </a:rPr>
-              <a:t>One reusable link for everyone; share directly or via Outlook draft.</a:t>
+              <a:t>One reusable link; it survives sign-out. Regenerating it invalidates the old link.</a:t>
             </a:r>
             <a:endParaRPr lang="en-US" sz="1150" dirty="0"/>
           </a:p>
@@ -2619,7 +2619,7 @@
                 <a:ea typeface="Calibri" pitchFamily="34" charset="-122"/>
                 <a:cs typeface="Calibri" pitchFamily="34" charset="-120"/>
               </a:rPr>
-              <a:t>2 / 8</a:t>
+              <a:t>2 / 9</a:t>
             </a:r>
             <a:endParaRPr lang="en-US" sz="1000" dirty="0"/>
           </a:p>
@@ -3038,7 +3038,7 @@
                 <a:ea typeface="Bookman Old Style" pitchFamily="34" charset="-122"/>
                 <a:cs typeface="Bookman Old Style" pitchFamily="34" charset="-120"/>
               </a:rPr>
-              <a:t>Delete</a:t>
+              <a:t>Delete Account &amp; Data</a:t>
             </a:r>
             <a:endParaRPr lang="en-US" sz="1800" dirty="0"/>
           </a:p>
@@ -3080,7 +3080,7 @@
                 <a:ea typeface="Calibri" pitchFamily="34" charset="-122"/>
                 <a:cs typeface="Calibri" pitchFamily="34" charset="-120"/>
               </a:rPr>
-              <a:t>Remove a message for good, with a confirmation step.</a:t>
+              <a:t>Delete one message, or confirm to permanently remove your account, messages, and invite links.</a:t>
             </a:r>
             <a:endParaRPr lang="en-US" sz="1300" dirty="0"/>
           </a:p>
@@ -3294,7 +3294,7 @@
                 <a:ea typeface="Calibri" pitchFamily="34" charset="-122"/>
                 <a:cs typeface="Calibri" pitchFamily="34" charset="-120"/>
               </a:rPr>
-              <a:t>3 / 8</a:t>
+              <a:t>3 / 9</a:t>
             </a:r>
             <a:endParaRPr lang="en-US" sz="1000" dirty="0"/>
           </a:p>
@@ -3427,7 +3427,7 @@
         </p:nvGraphicFramePr>
         <p:xfrm>
           <a:off x="548640" y="1691640"/>
-          <a:ext cx="11064240" cy="4873752"/>
+          <a:ext cx="11064240" cy="4895088"/>
         </p:xfrm>
         <a:graphic>
           <a:graphicData uri="http://schemas.openxmlformats.org/drawingml/2006/table">
@@ -3469,25 +3469,20 @@
                     <a:bodyPr/>
                     <a:lstStyle/>
                     <a:p>
-                      <a:pPr marL="0" indent="0">
-                        <a:buNone/>
+                      <a:pPr>
+                        <a:spcBef>
+                          <a:spcPts val="0"/>
+                        </a:spcBef>
+                        <a:spcAft>
+                          <a:spcPts val="0"/>
+                        </a:spcAft>
                       </a:pPr>
                       <a:r>
-                        <a:rPr lang="en-US" sz="1100" b="1" dirty="0">
-                          <a:solidFill>
-                            <a:srgbClr val="FFFFFF"/>
-                          </a:solidFill>
-                          <a:latin typeface="Calibri" pitchFamily="34" charset="0"/>
-                          <a:ea typeface="Calibri" pitchFamily="34" charset="-122"/>
-                          <a:cs typeface="Calibri" pitchFamily="34" charset="-120"/>
+                        <a:rPr sz="1100" b="1">
+                          <a:latin typeface="Calibri"/>
                         </a:rPr>
                         <a:t>Service</a:t>
                       </a:r>
-                      <a:endParaRPr lang="en-US" sz="1100" dirty="0">
-                        <a:latin typeface="Calibri" charset="0"/>
-                        <a:ea typeface="Calibri" charset="0"/>
-                        <a:cs typeface="Calibri" charset="0"/>
-                      </a:endParaRPr>
                     </a:p>
                   </a:txBody>
                   <a:tcPr>
@@ -3537,25 +3532,20 @@
                     <a:bodyPr/>
                     <a:lstStyle/>
                     <a:p>
-                      <a:pPr marL="0" indent="0">
-                        <a:buNone/>
+                      <a:pPr>
+                        <a:spcBef>
+                          <a:spcPts val="0"/>
+                        </a:spcBef>
+                        <a:spcAft>
+                          <a:spcPts val="0"/>
+                        </a:spcAft>
                       </a:pPr>
                       <a:r>
-                        <a:rPr lang="en-US" sz="1100" b="1" dirty="0">
-                          <a:solidFill>
-                            <a:srgbClr val="FFFFFF"/>
-                          </a:solidFill>
-                          <a:latin typeface="Calibri" pitchFamily="34" charset="0"/>
-                          <a:ea typeface="Calibri" pitchFamily="34" charset="-122"/>
-                          <a:cs typeface="Calibri" pitchFamily="34" charset="-120"/>
+                        <a:rPr sz="1100" b="1">
+                          <a:latin typeface="Calibri"/>
                         </a:rPr>
                         <a:t>Method</a:t>
                       </a:r>
-                      <a:endParaRPr lang="en-US" sz="1100" dirty="0">
-                        <a:latin typeface="Calibri" charset="0"/>
-                        <a:ea typeface="Calibri" charset="0"/>
-                        <a:cs typeface="Calibri" charset="0"/>
-                      </a:endParaRPr>
                     </a:p>
                   </a:txBody>
                   <a:tcPr>
@@ -3605,25 +3595,20 @@
                     <a:bodyPr/>
                     <a:lstStyle/>
                     <a:p>
-                      <a:pPr marL="0" indent="0">
-                        <a:buNone/>
+                      <a:pPr>
+                        <a:spcBef>
+                          <a:spcPts val="0"/>
+                        </a:spcBef>
+                        <a:spcAft>
+                          <a:spcPts val="0"/>
+                        </a:spcAft>
                       </a:pPr>
                       <a:r>
-                        <a:rPr lang="en-US" sz="1100" b="1" dirty="0">
-                          <a:solidFill>
-                            <a:srgbClr val="FFFFFF"/>
-                          </a:solidFill>
-                          <a:latin typeface="Calibri" pitchFamily="34" charset="0"/>
-                          <a:ea typeface="Calibri" pitchFamily="34" charset="-122"/>
-                          <a:cs typeface="Calibri" pitchFamily="34" charset="-120"/>
+                        <a:rPr sz="1100" b="1">
+                          <a:latin typeface="Calibri"/>
                         </a:rPr>
                         <a:t>Endpoint</a:t>
                       </a:r>
-                      <a:endParaRPr lang="en-US" sz="1100" dirty="0">
-                        <a:latin typeface="Calibri" charset="0"/>
-                        <a:ea typeface="Calibri" charset="0"/>
-                        <a:cs typeface="Calibri" charset="0"/>
-                      </a:endParaRPr>
                     </a:p>
                   </a:txBody>
                   <a:tcPr>
@@ -3673,25 +3658,20 @@
                     <a:bodyPr/>
                     <a:lstStyle/>
                     <a:p>
-                      <a:pPr marL="0" indent="0">
-                        <a:buNone/>
+                      <a:pPr>
+                        <a:spcBef>
+                          <a:spcPts val="0"/>
+                        </a:spcBef>
+                        <a:spcAft>
+                          <a:spcPts val="0"/>
+                        </a:spcAft>
                       </a:pPr>
                       <a:r>
-                        <a:rPr lang="en-US" sz="1100" b="1" dirty="0">
-                          <a:solidFill>
-                            <a:srgbClr val="FFFFFF"/>
-                          </a:solidFill>
-                          <a:latin typeface="Calibri" pitchFamily="34" charset="0"/>
-                          <a:ea typeface="Calibri" pitchFamily="34" charset="-122"/>
-                          <a:cs typeface="Calibri" pitchFamily="34" charset="-120"/>
+                        <a:rPr sz="1100" b="1">
+                          <a:latin typeface="Calibri"/>
                         </a:rPr>
                         <a:t>Purpose</a:t>
                       </a:r>
-                      <a:endParaRPr lang="en-US" sz="1100" dirty="0">
-                        <a:latin typeface="Calibri" charset="0"/>
-                        <a:ea typeface="Calibri" charset="0"/>
-                        <a:cs typeface="Calibri" charset="0"/>
-                      </a:endParaRPr>
                     </a:p>
                   </a:txBody>
                   <a:tcPr>
@@ -3748,25 +3728,20 @@
                     <a:bodyPr/>
                     <a:lstStyle/>
                     <a:p>
-                      <a:pPr marL="0" indent="0">
-                        <a:buNone/>
+                      <a:pPr>
+                        <a:spcBef>
+                          <a:spcPts val="0"/>
+                        </a:spcBef>
+                        <a:spcAft>
+                          <a:spcPts val="0"/>
+                        </a:spcAft>
                       </a:pPr>
                       <a:r>
-                        <a:rPr lang="en-US" sz="1050" dirty="0">
-                          <a:solidFill>
-                            <a:srgbClr val="6B655C"/>
-                          </a:solidFill>
-                          <a:latin typeface="Calibri" pitchFamily="34" charset="0"/>
-                          <a:ea typeface="Calibri" pitchFamily="34" charset="-122"/>
-                          <a:cs typeface="Calibri" pitchFamily="34" charset="-120"/>
+                        <a:rPr sz="1000" b="0">
+                          <a:latin typeface="Calibri"/>
                         </a:rPr>
                         <a:t>user-service</a:t>
                       </a:r>
-                      <a:endParaRPr lang="en-US" sz="1050" dirty="0">
-                        <a:latin typeface="Calibri" charset="0"/>
-                        <a:ea typeface="Calibri" charset="0"/>
-                        <a:cs typeface="Calibri" charset="0"/>
-                      </a:endParaRPr>
                     </a:p>
                   </a:txBody>
                   <a:tcPr anchor="ctr">
@@ -3813,25 +3788,20 @@
                     <a:bodyPr/>
                     <a:lstStyle/>
                     <a:p>
-                      <a:pPr marL="0" indent="0">
-                        <a:buNone/>
+                      <a:pPr>
+                        <a:spcBef>
+                          <a:spcPts val="0"/>
+                        </a:spcBef>
+                        <a:spcAft>
+                          <a:spcPts val="0"/>
+                        </a:spcAft>
                       </a:pPr>
                       <a:r>
-                        <a:rPr lang="en-US" sz="1050" b="1" dirty="0">
-                          <a:solidFill>
-                            <a:srgbClr val="2F6F6B"/>
-                          </a:solidFill>
-                          <a:latin typeface="Calibri" pitchFamily="34" charset="0"/>
-                          <a:ea typeface="Calibri" pitchFamily="34" charset="-122"/>
-                          <a:cs typeface="Calibri" pitchFamily="34" charset="-120"/>
+                        <a:rPr sz="1000" b="1">
+                          <a:latin typeface="Calibri"/>
                         </a:rPr>
                         <a:t>POST</a:t>
                       </a:r>
-                      <a:endParaRPr lang="en-US" sz="1050" dirty="0">
-                        <a:latin typeface="Calibri" charset="0"/>
-                        <a:ea typeface="Calibri" charset="0"/>
-                        <a:cs typeface="Calibri" charset="0"/>
-                      </a:endParaRPr>
                     </a:p>
                   </a:txBody>
                   <a:tcPr anchor="ctr">
@@ -3878,25 +3848,20 @@
                     <a:bodyPr/>
                     <a:lstStyle/>
                     <a:p>
-                      <a:pPr marL="0" indent="0">
-                        <a:buNone/>
+                      <a:pPr>
+                        <a:spcBef>
+                          <a:spcPts val="0"/>
+                        </a:spcBef>
+                        <a:spcAft>
+                          <a:spcPts val="0"/>
+                        </a:spcAft>
                       </a:pPr>
                       <a:r>
-                        <a:rPr lang="en-US" sz="1000" dirty="0">
-                          <a:solidFill>
-                            <a:srgbClr val="8C3B24"/>
-                          </a:solidFill>
-                          <a:latin typeface="Consolas" pitchFamily="34" charset="0"/>
-                          <a:ea typeface="Consolas" pitchFamily="34" charset="-122"/>
-                          <a:cs typeface="Consolas" pitchFamily="34" charset="-120"/>
+                        <a:rPr sz="1000" b="0">
+                          <a:latin typeface="Consolas"/>
                         </a:rPr>
-                        <a:t>/auth</a:t>
+                        <a:t>/auth/register · /auth/login</a:t>
                       </a:r>
-                      <a:endParaRPr lang="en-US" sz="1000" dirty="0">
-                        <a:latin typeface="Consolas" charset="0"/>
-                        <a:ea typeface="Consolas" charset="0"/>
-                        <a:cs typeface="Consolas" charset="0"/>
-                      </a:endParaRPr>
                     </a:p>
                   </a:txBody>
                   <a:tcPr anchor="ctr">
@@ -3943,25 +3908,20 @@
                     <a:bodyPr/>
                     <a:lstStyle/>
                     <a:p>
-                      <a:pPr marL="0" indent="0">
-                        <a:buNone/>
+                      <a:pPr>
+                        <a:spcBef>
+                          <a:spcPts val="0"/>
+                        </a:spcBef>
+                        <a:spcAft>
+                          <a:spcPts val="0"/>
+                        </a:spcAft>
                       </a:pPr>
                       <a:r>
-                        <a:rPr lang="en-US" sz="1050" dirty="0">
-                          <a:solidFill>
-                            <a:srgbClr val="1C1A17"/>
-                          </a:solidFill>
-                          <a:latin typeface="Calibri" pitchFamily="34" charset="0"/>
-                          <a:ea typeface="Calibri" pitchFamily="34" charset="-122"/>
-                          <a:cs typeface="Calibri" pitchFamily="34" charset="-120"/>
+                        <a:rPr sz="1000" b="0">
+                          <a:latin typeface="Calibri"/>
                         </a:rPr>
-                        <a:t>Log in, or register on first use</a:t>
+                        <a:t>Create an account or sign in with a password</a:t>
                       </a:r>
-                      <a:endParaRPr lang="en-US" sz="1050" dirty="0">
-                        <a:latin typeface="Calibri" charset="0"/>
-                        <a:ea typeface="Calibri" charset="0"/>
-                        <a:cs typeface="Calibri" charset="0"/>
-                      </a:endParaRPr>
                     </a:p>
                   </a:txBody>
                   <a:tcPr anchor="ctr">
@@ -4015,25 +3975,20 @@
                     <a:bodyPr/>
                     <a:lstStyle/>
                     <a:p>
-                      <a:pPr marL="0" indent="0">
-                        <a:buNone/>
+                      <a:pPr>
+                        <a:spcBef>
+                          <a:spcPts val="0"/>
+                        </a:spcBef>
+                        <a:spcAft>
+                          <a:spcPts val="0"/>
+                        </a:spcAft>
                       </a:pPr>
                       <a:r>
-                        <a:rPr lang="en-US" sz="1050" dirty="0">
-                          <a:solidFill>
-                            <a:srgbClr val="6B655C"/>
-                          </a:solidFill>
-                          <a:latin typeface="Calibri" pitchFamily="34" charset="0"/>
-                          <a:ea typeface="Calibri" pitchFamily="34" charset="-122"/>
-                          <a:cs typeface="Calibri" pitchFamily="34" charset="-120"/>
+                        <a:rPr sz="1000" b="0">
+                          <a:latin typeface="Calibri"/>
                         </a:rPr>
                         <a:t>user-service</a:t>
                       </a:r>
-                      <a:endParaRPr lang="en-US" sz="1050" dirty="0">
-                        <a:latin typeface="Calibri" charset="0"/>
-                        <a:ea typeface="Calibri" charset="0"/>
-                        <a:cs typeface="Calibri" charset="0"/>
-                      </a:endParaRPr>
                     </a:p>
                   </a:txBody>
                   <a:tcPr anchor="ctr">
@@ -4080,25 +4035,20 @@
                     <a:bodyPr/>
                     <a:lstStyle/>
                     <a:p>
-                      <a:pPr marL="0" indent="0">
-                        <a:buNone/>
+                      <a:pPr>
+                        <a:spcBef>
+                          <a:spcPts val="0"/>
+                        </a:spcBef>
+                        <a:spcAft>
+                          <a:spcPts val="0"/>
+                        </a:spcAft>
                       </a:pPr>
                       <a:r>
-                        <a:rPr lang="en-US" sz="1050" b="1" dirty="0">
-                          <a:solidFill>
-                            <a:srgbClr val="2F6F6B"/>
-                          </a:solidFill>
-                          <a:latin typeface="Calibri" pitchFamily="34" charset="0"/>
-                          <a:ea typeface="Calibri" pitchFamily="34" charset="-122"/>
-                          <a:cs typeface="Calibri" pitchFamily="34" charset="-120"/>
+                        <a:rPr sz="1000" b="1">
+                          <a:latin typeface="Calibri"/>
                         </a:rPr>
                         <a:t>GET</a:t>
                       </a:r>
-                      <a:endParaRPr lang="en-US" sz="1050" dirty="0">
-                        <a:latin typeface="Calibri" charset="0"/>
-                        <a:ea typeface="Calibri" charset="0"/>
-                        <a:cs typeface="Calibri" charset="0"/>
-                      </a:endParaRPr>
                     </a:p>
                   </a:txBody>
                   <a:tcPr anchor="ctr">
@@ -4145,25 +4095,20 @@
                     <a:bodyPr/>
                     <a:lstStyle/>
                     <a:p>
-                      <a:pPr marL="0" indent="0">
-                        <a:buNone/>
+                      <a:pPr>
+                        <a:spcBef>
+                          <a:spcPts val="0"/>
+                        </a:spcBef>
+                        <a:spcAft>
+                          <a:spcPts val="0"/>
+                        </a:spcAft>
                       </a:pPr>
                       <a:r>
-                        <a:rPr lang="en-US" sz="1000" dirty="0">
-                          <a:solidFill>
-                            <a:srgbClr val="8C3B24"/>
-                          </a:solidFill>
-                          <a:latin typeface="Consolas" pitchFamily="34" charset="0"/>
-                          <a:ea typeface="Consolas" pitchFamily="34" charset="-122"/>
-                          <a:cs typeface="Consolas" pitchFamily="34" charset="-120"/>
+                        <a:rPr sz="1000" b="0">
+                          <a:latin typeface="Consolas"/>
                         </a:rPr>
                         <a:t>/users/{user_id}</a:t>
                       </a:r>
-                      <a:endParaRPr lang="en-US" sz="1000" dirty="0">
-                        <a:latin typeface="Consolas" charset="0"/>
-                        <a:ea typeface="Consolas" charset="0"/>
-                        <a:cs typeface="Consolas" charset="0"/>
-                      </a:endParaRPr>
                     </a:p>
                   </a:txBody>
                   <a:tcPr anchor="ctr">
@@ -4210,25 +4155,20 @@
                     <a:bodyPr/>
                     <a:lstStyle/>
                     <a:p>
-                      <a:pPr marL="0" indent="0">
-                        <a:buNone/>
+                      <a:pPr>
+                        <a:spcBef>
+                          <a:spcPts val="0"/>
+                        </a:spcBef>
+                        <a:spcAft>
+                          <a:spcPts val="0"/>
+                        </a:spcAft>
                       </a:pPr>
                       <a:r>
-                        <a:rPr lang="en-US" sz="1050" dirty="0">
-                          <a:solidFill>
-                            <a:srgbClr val="1C1A17"/>
-                          </a:solidFill>
-                          <a:latin typeface="Calibri" pitchFamily="34" charset="0"/>
-                          <a:ea typeface="Calibri" pitchFamily="34" charset="-122"/>
-                          <a:cs typeface="Calibri" pitchFamily="34" charset="-120"/>
+                        <a:rPr sz="1000" b="0">
+                          <a:latin typeface="Calibri"/>
                         </a:rPr>
-                        <a:t>Fetch profile &amp; inbox settings</a:t>
+                        <a:t>Read owner profile (token required)</a:t>
                       </a:r>
-                      <a:endParaRPr lang="en-US" sz="1050" dirty="0">
-                        <a:latin typeface="Calibri" charset="0"/>
-                        <a:ea typeface="Calibri" charset="0"/>
-                        <a:cs typeface="Calibri" charset="0"/>
-                      </a:endParaRPr>
                     </a:p>
                   </a:txBody>
                   <a:tcPr anchor="ctr">
@@ -4282,25 +4222,20 @@
                     <a:bodyPr/>
                     <a:lstStyle/>
                     <a:p>
-                      <a:pPr marL="0" indent="0">
-                        <a:buNone/>
+                      <a:pPr>
+                        <a:spcBef>
+                          <a:spcPts val="0"/>
+                        </a:spcBef>
+                        <a:spcAft>
+                          <a:spcPts val="0"/>
+                        </a:spcAft>
                       </a:pPr>
                       <a:r>
-                        <a:rPr lang="en-US" sz="1050" dirty="0">
-                          <a:solidFill>
-                            <a:srgbClr val="6B655C"/>
-                          </a:solidFill>
-                          <a:latin typeface="Calibri" pitchFamily="34" charset="0"/>
-                          <a:ea typeface="Calibri" pitchFamily="34" charset="-122"/>
-                          <a:cs typeface="Calibri" pitchFamily="34" charset="-120"/>
+                        <a:rPr sz="1000" b="0">
+                          <a:latin typeface="Calibri"/>
                         </a:rPr>
                         <a:t>user-service</a:t>
                       </a:r>
-                      <a:endParaRPr lang="en-US" sz="1050" dirty="0">
-                        <a:latin typeface="Calibri" charset="0"/>
-                        <a:ea typeface="Calibri" charset="0"/>
-                        <a:cs typeface="Calibri" charset="0"/>
-                      </a:endParaRPr>
                     </a:p>
                   </a:txBody>
                   <a:tcPr anchor="ctr">
@@ -4347,25 +4282,20 @@
                     <a:bodyPr/>
                     <a:lstStyle/>
                     <a:p>
-                      <a:pPr marL="0" indent="0">
-                        <a:buNone/>
+                      <a:pPr>
+                        <a:spcBef>
+                          <a:spcPts val="0"/>
+                        </a:spcBef>
+                        <a:spcAft>
+                          <a:spcPts val="0"/>
+                        </a:spcAft>
                       </a:pPr>
                       <a:r>
-                        <a:rPr lang="en-US" sz="1050" b="1" dirty="0">
-                          <a:solidFill>
-                            <a:srgbClr val="2F6F6B"/>
-                          </a:solidFill>
-                          <a:latin typeface="Calibri" pitchFamily="34" charset="0"/>
-                          <a:ea typeface="Calibri" pitchFamily="34" charset="-122"/>
-                          <a:cs typeface="Calibri" pitchFamily="34" charset="-120"/>
+                        <a:rPr sz="1000" b="1">
+                          <a:latin typeface="Calibri"/>
                         </a:rPr>
-                        <a:t>PATCH</a:t>
+                        <a:t>GET</a:t>
                       </a:r>
-                      <a:endParaRPr lang="en-US" sz="1050" dirty="0">
-                        <a:latin typeface="Calibri" charset="0"/>
-                        <a:ea typeface="Calibri" charset="0"/>
-                        <a:cs typeface="Calibri" charset="0"/>
-                      </a:endParaRPr>
                     </a:p>
                   </a:txBody>
                   <a:tcPr anchor="ctr">
@@ -4412,25 +4342,20 @@
                     <a:bodyPr/>
                     <a:lstStyle/>
                     <a:p>
-                      <a:pPr marL="0" indent="0">
-                        <a:buNone/>
+                      <a:pPr>
+                        <a:spcBef>
+                          <a:spcPts val="0"/>
+                        </a:spcBef>
+                        <a:spcAft>
+                          <a:spcPts val="0"/>
+                        </a:spcAft>
                       </a:pPr>
                       <a:r>
-                        <a:rPr lang="en-US" sz="1000" dirty="0">
-                          <a:solidFill>
-                            <a:srgbClr val="8C3B24"/>
-                          </a:solidFill>
-                          <a:latin typeface="Consolas" pitchFamily="34" charset="0"/>
-                          <a:ea typeface="Consolas" pitchFamily="34" charset="-122"/>
-                          <a:cs typeface="Consolas" pitchFamily="34" charset="-120"/>
+                        <a:rPr sz="1000" b="0">
+                          <a:latin typeface="Consolas"/>
                         </a:rPr>
-                        <a:t>/users/{user_id}/settings</a:t>
+                        <a:t>/users/{user_id}/status</a:t>
                       </a:r>
-                      <a:endParaRPr lang="en-US" sz="1000" dirty="0">
-                        <a:latin typeface="Consolas" charset="0"/>
-                        <a:ea typeface="Consolas" charset="0"/>
-                        <a:cs typeface="Consolas" charset="0"/>
-                      </a:endParaRPr>
                     </a:p>
                   </a:txBody>
                   <a:tcPr anchor="ctr">
@@ -4477,25 +4402,20 @@
                     <a:bodyPr/>
                     <a:lstStyle/>
                     <a:p>
-                      <a:pPr marL="0" indent="0">
-                        <a:buNone/>
+                      <a:pPr>
+                        <a:spcBef>
+                          <a:spcPts val="0"/>
+                        </a:spcBef>
+                        <a:spcAft>
+                          <a:spcPts val="0"/>
+                        </a:spcAft>
                       </a:pPr>
                       <a:r>
-                        <a:rPr lang="en-US" sz="1050" dirty="0">
-                          <a:solidFill>
-                            <a:srgbClr val="1C1A17"/>
-                          </a:solidFill>
-                          <a:latin typeface="Calibri" pitchFamily="34" charset="0"/>
-                          <a:ea typeface="Calibri" pitchFamily="34" charset="-122"/>
-                          <a:cs typeface="Calibri" pitchFamily="34" charset="-120"/>
+                        <a:rPr sz="1000" b="0">
+                          <a:latin typeface="Calibri"/>
                         </a:rPr>
-                        <a:t>Pause or resume accepting messages</a:t>
+                        <a:t>Check whether feedback is open</a:t>
                       </a:r>
-                      <a:endParaRPr lang="en-US" sz="1050" dirty="0">
-                        <a:latin typeface="Calibri" charset="0"/>
-                        <a:ea typeface="Calibri" charset="0"/>
-                        <a:cs typeface="Calibri" charset="0"/>
-                      </a:endParaRPr>
                     </a:p>
                   </a:txBody>
                   <a:tcPr anchor="ctr">
@@ -4549,25 +4469,20 @@
                     <a:bodyPr/>
                     <a:lstStyle/>
                     <a:p>
-                      <a:pPr marL="0" indent="0">
-                        <a:buNone/>
+                      <a:pPr>
+                        <a:spcBef>
+                          <a:spcPts val="0"/>
+                        </a:spcBef>
+                        <a:spcAft>
+                          <a:spcPts val="0"/>
+                        </a:spcAft>
                       </a:pPr>
                       <a:r>
-                        <a:rPr lang="en-US" sz="1050" dirty="0">
-                          <a:solidFill>
-                            <a:srgbClr val="6B655C"/>
-                          </a:solidFill>
-                          <a:latin typeface="Calibri" pitchFamily="34" charset="0"/>
-                          <a:ea typeface="Calibri" pitchFamily="34" charset="-122"/>
-                          <a:cs typeface="Calibri" pitchFamily="34" charset="-120"/>
+                        <a:rPr sz="1000" b="0">
+                          <a:latin typeface="Calibri"/>
                         </a:rPr>
-                        <a:t>message-service</a:t>
+                        <a:t>user-service</a:t>
                       </a:r>
-                      <a:endParaRPr lang="en-US" sz="1050" dirty="0">
-                        <a:latin typeface="Calibri" charset="0"/>
-                        <a:ea typeface="Calibri" charset="0"/>
-                        <a:cs typeface="Calibri" charset="0"/>
-                      </a:endParaRPr>
                     </a:p>
                   </a:txBody>
                   <a:tcPr anchor="ctr">
@@ -4614,25 +4529,20 @@
                     <a:bodyPr/>
                     <a:lstStyle/>
                     <a:p>
-                      <a:pPr marL="0" indent="0">
-                        <a:buNone/>
+                      <a:pPr>
+                        <a:spcBef>
+                          <a:spcPts val="0"/>
+                        </a:spcBef>
+                        <a:spcAft>
+                          <a:spcPts val="0"/>
+                        </a:spcAft>
                       </a:pPr>
                       <a:r>
-                        <a:rPr lang="en-US" sz="1050" b="1" dirty="0">
-                          <a:solidFill>
-                            <a:srgbClr val="2F6F6B"/>
-                          </a:solidFill>
-                          <a:latin typeface="Calibri" pitchFamily="34" charset="0"/>
-                          <a:ea typeface="Calibri" pitchFamily="34" charset="-122"/>
-                          <a:cs typeface="Calibri" pitchFamily="34" charset="-120"/>
+                        <a:rPr sz="1000" b="1">
+                          <a:latin typeface="Calibri"/>
                         </a:rPr>
-                        <a:t>POST</a:t>
+                        <a:t>PATCH</a:t>
                       </a:r>
-                      <a:endParaRPr lang="en-US" sz="1050" dirty="0">
-                        <a:latin typeface="Calibri" charset="0"/>
-                        <a:ea typeface="Calibri" charset="0"/>
-                        <a:cs typeface="Calibri" charset="0"/>
-                      </a:endParaRPr>
                     </a:p>
                   </a:txBody>
                   <a:tcPr anchor="ctr">
@@ -4679,25 +4589,20 @@
                     <a:bodyPr/>
                     <a:lstStyle/>
                     <a:p>
-                      <a:pPr marL="0" indent="0">
-                        <a:buNone/>
+                      <a:pPr>
+                        <a:spcBef>
+                          <a:spcPts val="0"/>
+                        </a:spcBef>
+                        <a:spcAft>
+                          <a:spcPts val="0"/>
+                        </a:spcAft>
                       </a:pPr>
                       <a:r>
-                        <a:rPr lang="en-US" sz="1000" dirty="0">
-                          <a:solidFill>
-                            <a:srgbClr val="8C3B24"/>
-                          </a:solidFill>
-                          <a:latin typeface="Consolas" pitchFamily="34" charset="0"/>
-                          <a:ea typeface="Consolas" pitchFamily="34" charset="-122"/>
-                          <a:cs typeface="Consolas" pitchFamily="34" charset="-120"/>
+                        <a:rPr sz="1000" b="0">
+                          <a:latin typeface="Consolas"/>
                         </a:rPr>
-                        <a:t>/invites/{user_id}</a:t>
+                        <a:t>/users/{user_id}/settings</a:t>
                       </a:r>
-                      <a:endParaRPr lang="en-US" sz="1000" dirty="0">
-                        <a:latin typeface="Consolas" charset="0"/>
-                        <a:ea typeface="Consolas" charset="0"/>
-                        <a:cs typeface="Consolas" charset="0"/>
-                      </a:endParaRPr>
                     </a:p>
                   </a:txBody>
                   <a:tcPr anchor="ctr">
@@ -4744,25 +4649,20 @@
                     <a:bodyPr/>
                     <a:lstStyle/>
                     <a:p>
-                      <a:pPr marL="0" indent="0">
-                        <a:buNone/>
+                      <a:pPr>
+                        <a:spcBef>
+                          <a:spcPts val="0"/>
+                        </a:spcBef>
+                        <a:spcAft>
+                          <a:spcPts val="0"/>
+                        </a:spcAft>
                       </a:pPr>
                       <a:r>
-                        <a:rPr lang="en-US" sz="1050" dirty="0">
-                          <a:solidFill>
-                            <a:srgbClr val="1C1A17"/>
-                          </a:solidFill>
-                          <a:latin typeface="Calibri" pitchFamily="34" charset="0"/>
-                          <a:ea typeface="Calibri" pitchFamily="34" charset="-122"/>
-                          <a:cs typeface="Calibri" pitchFamily="34" charset="-120"/>
+                        <a:rPr sz="1000" b="0">
+                          <a:latin typeface="Calibri"/>
                         </a:rPr>
-                        <a:t>Create a reusable invite link</a:t>
+                        <a:t>Pause or resume feedback (owner token)</a:t>
                       </a:r>
-                      <a:endParaRPr lang="en-US" sz="1050" dirty="0">
-                        <a:latin typeface="Calibri" charset="0"/>
-                        <a:ea typeface="Calibri" charset="0"/>
-                        <a:cs typeface="Calibri" charset="0"/>
-                      </a:endParaRPr>
                     </a:p>
                   </a:txBody>
                   <a:tcPr anchor="ctr">
@@ -4816,25 +4716,20 @@
                     <a:bodyPr/>
                     <a:lstStyle/>
                     <a:p>
-                      <a:pPr marL="0" indent="0">
-                        <a:buNone/>
+                      <a:pPr>
+                        <a:spcBef>
+                          <a:spcPts val="0"/>
+                        </a:spcBef>
+                        <a:spcAft>
+                          <a:spcPts val="0"/>
+                        </a:spcAft>
                       </a:pPr>
                       <a:r>
-                        <a:rPr lang="en-US" sz="1050" dirty="0">
-                          <a:solidFill>
-                            <a:srgbClr val="6B655C"/>
-                          </a:solidFill>
-                          <a:latin typeface="Calibri" pitchFamily="34" charset="0"/>
-                          <a:ea typeface="Calibri" pitchFamily="34" charset="-122"/>
-                          <a:cs typeface="Calibri" pitchFamily="34" charset="-120"/>
+                        <a:rPr sz="1000" b="0">
+                          <a:latin typeface="Calibri"/>
                         </a:rPr>
-                        <a:t>message-service</a:t>
+                        <a:t>user-service</a:t>
                       </a:r>
-                      <a:endParaRPr lang="en-US" sz="1050" dirty="0">
-                        <a:latin typeface="Calibri" charset="0"/>
-                        <a:ea typeface="Calibri" charset="0"/>
-                        <a:cs typeface="Calibri" charset="0"/>
-                      </a:endParaRPr>
                     </a:p>
                   </a:txBody>
                   <a:tcPr anchor="ctr">
@@ -4881,25 +4776,20 @@
                     <a:bodyPr/>
                     <a:lstStyle/>
                     <a:p>
-                      <a:pPr marL="0" indent="0">
-                        <a:buNone/>
+                      <a:pPr>
+                        <a:spcBef>
+                          <a:spcPts val="0"/>
+                        </a:spcBef>
+                        <a:spcAft>
+                          <a:spcPts val="0"/>
+                        </a:spcAft>
                       </a:pPr>
                       <a:r>
-                        <a:rPr lang="en-US" sz="1050" b="1" dirty="0">
-                          <a:solidFill>
-                            <a:srgbClr val="2F6F6B"/>
-                          </a:solidFill>
-                          <a:latin typeface="Calibri" pitchFamily="34" charset="0"/>
-                          <a:ea typeface="Calibri" pitchFamily="34" charset="-122"/>
-                          <a:cs typeface="Calibri" pitchFamily="34" charset="-120"/>
+                        <a:rPr sz="1000" b="1">
+                          <a:latin typeface="Calibri"/>
                         </a:rPr>
-                        <a:t>GET</a:t>
+                        <a:t>DELETE</a:t>
                       </a:r>
-                      <a:endParaRPr lang="en-US" sz="1050" dirty="0">
-                        <a:latin typeface="Calibri" charset="0"/>
-                        <a:ea typeface="Calibri" charset="0"/>
-                        <a:cs typeface="Calibri" charset="0"/>
-                      </a:endParaRPr>
                     </a:p>
                   </a:txBody>
                   <a:tcPr anchor="ctr">
@@ -4946,25 +4836,20 @@
                     <a:bodyPr/>
                     <a:lstStyle/>
                     <a:p>
-                      <a:pPr marL="0" indent="0">
-                        <a:buNone/>
+                      <a:pPr>
+                        <a:spcBef>
+                          <a:spcPts val="0"/>
+                        </a:spcBef>
+                        <a:spcAft>
+                          <a:spcPts val="0"/>
+                        </a:spcAft>
                       </a:pPr>
                       <a:r>
-                        <a:rPr lang="en-US" sz="1000" dirty="0">
-                          <a:solidFill>
-                            <a:srgbClr val="8C3B24"/>
-                          </a:solidFill>
-                          <a:latin typeface="Consolas" pitchFamily="34" charset="0"/>
-                          <a:ea typeface="Consolas" pitchFamily="34" charset="-122"/>
-                          <a:cs typeface="Consolas" pitchFamily="34" charset="-120"/>
+                        <a:rPr sz="1000" b="0">
+                          <a:latin typeface="Consolas"/>
                         </a:rPr>
-                        <a:t>/messages/{user_id}</a:t>
+                        <a:t>/users/{user_id}</a:t>
                       </a:r>
-                      <a:endParaRPr lang="en-US" sz="1000" dirty="0">
-                        <a:latin typeface="Consolas" charset="0"/>
-                        <a:ea typeface="Consolas" charset="0"/>
-                        <a:cs typeface="Consolas" charset="0"/>
-                      </a:endParaRPr>
                     </a:p>
                   </a:txBody>
                   <a:tcPr anchor="ctr">
@@ -5011,25 +4896,20 @@
                     <a:bodyPr/>
                     <a:lstStyle/>
                     <a:p>
-                      <a:pPr marL="0" indent="0">
-                        <a:buNone/>
+                      <a:pPr>
+                        <a:spcBef>
+                          <a:spcPts val="0"/>
+                        </a:spcBef>
+                        <a:spcAft>
+                          <a:spcPts val="0"/>
+                        </a:spcAft>
                       </a:pPr>
                       <a:r>
-                        <a:rPr lang="en-US" sz="1050" dirty="0">
-                          <a:solidFill>
-                            <a:srgbClr val="1C1A17"/>
-                          </a:solidFill>
-                          <a:latin typeface="Calibri" pitchFamily="34" charset="0"/>
-                          <a:ea typeface="Calibri" pitchFamily="34" charset="-122"/>
-                          <a:cs typeface="Calibri" pitchFamily="34" charset="-120"/>
+                        <a:rPr sz="1000" b="0">
+                          <a:latin typeface="Calibri"/>
                         </a:rPr>
-                        <a:t>Fetch inbox: active, archived, or reported</a:t>
+                        <a:t>Remove account and associated inbox data</a:t>
                       </a:r>
-                      <a:endParaRPr lang="en-US" sz="1050" dirty="0">
-                        <a:latin typeface="Calibri" charset="0"/>
-                        <a:ea typeface="Calibri" charset="0"/>
-                        <a:cs typeface="Calibri" charset="0"/>
-                      </a:endParaRPr>
                     </a:p>
                   </a:txBody>
                   <a:tcPr anchor="ctr">
@@ -5083,25 +4963,20 @@
                     <a:bodyPr/>
                     <a:lstStyle/>
                     <a:p>
-                      <a:pPr marL="0" indent="0">
-                        <a:buNone/>
+                      <a:pPr>
+                        <a:spcBef>
+                          <a:spcPts val="0"/>
+                        </a:spcBef>
+                        <a:spcAft>
+                          <a:spcPts val="0"/>
+                        </a:spcAft>
                       </a:pPr>
                       <a:r>
-                        <a:rPr lang="en-US" sz="1050" dirty="0">
-                          <a:solidFill>
-                            <a:srgbClr val="6B655C"/>
-                          </a:solidFill>
-                          <a:latin typeface="Calibri" pitchFamily="34" charset="0"/>
-                          <a:ea typeface="Calibri" pitchFamily="34" charset="-122"/>
-                          <a:cs typeface="Calibri" pitchFamily="34" charset="-120"/>
+                        <a:rPr sz="1000" b="0">
+                          <a:latin typeface="Calibri"/>
                         </a:rPr>
                         <a:t>message-service</a:t>
                       </a:r>
-                      <a:endParaRPr lang="en-US" sz="1050" dirty="0">
-                        <a:latin typeface="Calibri" charset="0"/>
-                        <a:ea typeface="Calibri" charset="0"/>
-                        <a:cs typeface="Calibri" charset="0"/>
-                      </a:endParaRPr>
                     </a:p>
                   </a:txBody>
                   <a:tcPr anchor="ctr">
@@ -5148,25 +5023,20 @@
                     <a:bodyPr/>
                     <a:lstStyle/>
                     <a:p>
-                      <a:pPr marL="0" indent="0">
-                        <a:buNone/>
+                      <a:pPr>
+                        <a:spcBef>
+                          <a:spcPts val="0"/>
+                        </a:spcBef>
+                        <a:spcAft>
+                          <a:spcPts val="0"/>
+                        </a:spcAft>
                       </a:pPr>
                       <a:r>
-                        <a:rPr lang="en-US" sz="1050" b="1" dirty="0">
-                          <a:solidFill>
-                            <a:srgbClr val="2F6F6B"/>
-                          </a:solidFill>
-                          <a:latin typeface="Calibri" pitchFamily="34" charset="0"/>
-                          <a:ea typeface="Calibri" pitchFamily="34" charset="-122"/>
-                          <a:cs typeface="Calibri" pitchFamily="34" charset="-120"/>
+                        <a:rPr sz="1000" b="1">
+                          <a:latin typeface="Calibri"/>
                         </a:rPr>
                         <a:t>GET</a:t>
                       </a:r>
-                      <a:endParaRPr lang="en-US" sz="1050" dirty="0">
-                        <a:latin typeface="Calibri" charset="0"/>
-                        <a:ea typeface="Calibri" charset="0"/>
-                        <a:cs typeface="Calibri" charset="0"/>
-                      </a:endParaRPr>
                     </a:p>
                   </a:txBody>
                   <a:tcPr anchor="ctr">
@@ -5213,25 +5083,20 @@
                     <a:bodyPr/>
                     <a:lstStyle/>
                     <a:p>
-                      <a:pPr marL="0" indent="0">
-                        <a:buNone/>
+                      <a:pPr>
+                        <a:spcBef>
+                          <a:spcPts val="0"/>
+                        </a:spcBef>
+                        <a:spcAft>
+                          <a:spcPts val="0"/>
+                        </a:spcAft>
                       </a:pPr>
                       <a:r>
-                        <a:rPr lang="en-US" sz="1000" dirty="0">
-                          <a:solidFill>
-                            <a:srgbClr val="8C3B24"/>
-                          </a:solidFill>
-                          <a:latin typeface="Consolas" pitchFamily="34" charset="0"/>
-                          <a:ea typeface="Consolas" pitchFamily="34" charset="-122"/>
-                          <a:cs typeface="Consolas" pitchFamily="34" charset="-120"/>
+                        <a:rPr sz="1000" b="0">
+                          <a:latin typeface="Consolas"/>
                         </a:rPr>
-                        <a:t>/messages/token/{token}</a:t>
+                        <a:t>/invites/{user_id}</a:t>
                       </a:r>
-                      <a:endParaRPr lang="en-US" sz="1000" dirty="0">
-                        <a:latin typeface="Consolas" charset="0"/>
-                        <a:ea typeface="Consolas" charset="0"/>
-                        <a:cs typeface="Consolas" charset="0"/>
-                      </a:endParaRPr>
                     </a:p>
                   </a:txBody>
                   <a:tcPr anchor="ctr">
@@ -5278,25 +5143,20 @@
                     <a:bodyPr/>
                     <a:lstStyle/>
                     <a:p>
-                      <a:pPr marL="0" indent="0">
-                        <a:buNone/>
+                      <a:pPr>
+                        <a:spcBef>
+                          <a:spcPts val="0"/>
+                        </a:spcBef>
+                        <a:spcAft>
+                          <a:spcPts val="0"/>
+                        </a:spcAft>
                       </a:pPr>
                       <a:r>
-                        <a:rPr lang="en-US" sz="1050" dirty="0">
-                          <a:solidFill>
-                            <a:srgbClr val="1C1A17"/>
-                          </a:solidFill>
-                          <a:latin typeface="Calibri" pitchFamily="34" charset="0"/>
-                          <a:ea typeface="Calibri" pitchFamily="34" charset="-122"/>
-                          <a:cs typeface="Calibri" pitchFamily="34" charset="-120"/>
+                        <a:rPr sz="1000" b="0">
+                          <a:latin typeface="Calibri"/>
                         </a:rPr>
-                        <a:t>Sender checks for a reply</a:t>
+                        <a:t>Restore saved link (owner token)</a:t>
                       </a:r>
-                      <a:endParaRPr lang="en-US" sz="1050" dirty="0">
-                        <a:latin typeface="Calibri" charset="0"/>
-                        <a:ea typeface="Calibri" charset="0"/>
-                        <a:cs typeface="Calibri" charset="0"/>
-                      </a:endParaRPr>
                     </a:p>
                   </a:txBody>
                   <a:tcPr anchor="ctr">
@@ -5350,25 +5210,20 @@
                     <a:bodyPr/>
                     <a:lstStyle/>
                     <a:p>
-                      <a:pPr marL="0" indent="0">
-                        <a:buNone/>
+                      <a:pPr>
+                        <a:spcBef>
+                          <a:spcPts val="0"/>
+                        </a:spcBef>
+                        <a:spcAft>
+                          <a:spcPts val="0"/>
+                        </a:spcAft>
                       </a:pPr>
                       <a:r>
-                        <a:rPr lang="en-US" sz="1050" dirty="0">
-                          <a:solidFill>
-                            <a:srgbClr val="6B655C"/>
-                          </a:solidFill>
-                          <a:latin typeface="Calibri" pitchFamily="34" charset="0"/>
-                          <a:ea typeface="Calibri" pitchFamily="34" charset="-122"/>
-                          <a:cs typeface="Calibri" pitchFamily="34" charset="-120"/>
+                        <a:rPr sz="1000" b="0">
+                          <a:latin typeface="Calibri"/>
                         </a:rPr>
                         <a:t>message-service</a:t>
                       </a:r>
-                      <a:endParaRPr lang="en-US" sz="1050" dirty="0">
-                        <a:latin typeface="Calibri" charset="0"/>
-                        <a:ea typeface="Calibri" charset="0"/>
-                        <a:cs typeface="Calibri" charset="0"/>
-                      </a:endParaRPr>
                     </a:p>
                   </a:txBody>
                   <a:tcPr anchor="ctr">
@@ -5415,25 +5270,20 @@
                     <a:bodyPr/>
                     <a:lstStyle/>
                     <a:p>
-                      <a:pPr marL="0" indent="0">
-                        <a:buNone/>
+                      <a:pPr>
+                        <a:spcBef>
+                          <a:spcPts val="0"/>
+                        </a:spcBef>
+                        <a:spcAft>
+                          <a:spcPts val="0"/>
+                        </a:spcAft>
                       </a:pPr>
                       <a:r>
-                        <a:rPr lang="en-US" sz="1050" b="1" dirty="0">
-                          <a:solidFill>
-                            <a:srgbClr val="2F6F6B"/>
-                          </a:solidFill>
-                          <a:latin typeface="Calibri" pitchFamily="34" charset="0"/>
-                          <a:ea typeface="Calibri" pitchFamily="34" charset="-122"/>
-                          <a:cs typeface="Calibri" pitchFamily="34" charset="-120"/>
+                        <a:rPr sz="1000" b="1">
+                          <a:latin typeface="Calibri"/>
                         </a:rPr>
-                        <a:t>PATCH</a:t>
+                        <a:t>POST</a:t>
                       </a:r>
-                      <a:endParaRPr lang="en-US" sz="1050" dirty="0">
-                        <a:latin typeface="Calibri" charset="0"/>
-                        <a:ea typeface="Calibri" charset="0"/>
-                        <a:cs typeface="Calibri" charset="0"/>
-                      </a:endParaRPr>
                     </a:p>
                   </a:txBody>
                   <a:tcPr anchor="ctr">
@@ -5480,25 +5330,20 @@
                     <a:bodyPr/>
                     <a:lstStyle/>
                     <a:p>
-                      <a:pPr marL="0" indent="0">
-                        <a:buNone/>
+                      <a:pPr>
+                        <a:spcBef>
+                          <a:spcPts val="0"/>
+                        </a:spcBef>
+                        <a:spcAft>
+                          <a:spcPts val="0"/>
+                        </a:spcAft>
                       </a:pPr>
                       <a:r>
-                        <a:rPr lang="en-US" sz="1000" dirty="0">
-                          <a:solidFill>
-                            <a:srgbClr val="8C3B24"/>
-                          </a:solidFill>
-                          <a:latin typeface="Consolas" pitchFamily="34" charset="0"/>
-                          <a:ea typeface="Consolas" pitchFamily="34" charset="-122"/>
-                          <a:cs typeface="Consolas" pitchFamily="34" charset="-120"/>
+                        <a:rPr sz="1000" b="0">
+                          <a:latin typeface="Consolas"/>
                         </a:rPr>
-                        <a:t>/messages/{id}/archive</a:t>
+                        <a:t>/invites/{user_id}</a:t>
                       </a:r>
-                      <a:endParaRPr lang="en-US" sz="1000" dirty="0">
-                        <a:latin typeface="Consolas" charset="0"/>
-                        <a:ea typeface="Consolas" charset="0"/>
-                        <a:cs typeface="Consolas" charset="0"/>
-                      </a:endParaRPr>
                     </a:p>
                   </a:txBody>
                   <a:tcPr anchor="ctr">
@@ -5545,25 +5390,20 @@
                     <a:bodyPr/>
                     <a:lstStyle/>
                     <a:p>
-                      <a:pPr marL="0" indent="0">
-                        <a:buNone/>
+                      <a:pPr>
+                        <a:spcBef>
+                          <a:spcPts val="0"/>
+                        </a:spcBef>
+                        <a:spcAft>
+                          <a:spcPts val="0"/>
+                        </a:spcAft>
                       </a:pPr>
                       <a:r>
-                        <a:rPr lang="en-US" sz="1050" dirty="0">
-                          <a:solidFill>
-                            <a:srgbClr val="1C1A17"/>
-                          </a:solidFill>
-                          <a:latin typeface="Calibri" pitchFamily="34" charset="0"/>
-                          <a:ea typeface="Calibri" pitchFamily="34" charset="-122"/>
-                          <a:cs typeface="Calibri" pitchFamily="34" charset="-120"/>
+                        <a:rPr sz="1000" b="0">
+                          <a:latin typeface="Calibri"/>
                         </a:rPr>
-                        <a:t>Move a message out of the inbox</a:t>
+                        <a:t>Replace link; invalidate the previous link</a:t>
                       </a:r>
-                      <a:endParaRPr lang="en-US" sz="1050" dirty="0">
-                        <a:latin typeface="Calibri" charset="0"/>
-                        <a:ea typeface="Calibri" charset="0"/>
-                        <a:cs typeface="Calibri" charset="0"/>
-                      </a:endParaRPr>
                     </a:p>
                   </a:txBody>
                   <a:tcPr anchor="ctr">
@@ -5617,25 +5457,20 @@
                     <a:bodyPr/>
                     <a:lstStyle/>
                     <a:p>
-                      <a:pPr marL="0" indent="0">
-                        <a:buNone/>
+                      <a:pPr>
+                        <a:spcBef>
+                          <a:spcPts val="0"/>
+                        </a:spcBef>
+                        <a:spcAft>
+                          <a:spcPts val="0"/>
+                        </a:spcAft>
                       </a:pPr>
                       <a:r>
-                        <a:rPr lang="en-US" sz="1050" dirty="0">
-                          <a:solidFill>
-                            <a:srgbClr val="6B655C"/>
-                          </a:solidFill>
-                          <a:latin typeface="Calibri" pitchFamily="34" charset="0"/>
-                          <a:ea typeface="Calibri" pitchFamily="34" charset="-122"/>
-                          <a:cs typeface="Calibri" pitchFamily="34" charset="-120"/>
+                        <a:rPr sz="1000" b="0">
+                          <a:latin typeface="Calibri"/>
                         </a:rPr>
                         <a:t>message-service</a:t>
                       </a:r>
-                      <a:endParaRPr lang="en-US" sz="1050" dirty="0">
-                        <a:latin typeface="Calibri" charset="0"/>
-                        <a:ea typeface="Calibri" charset="0"/>
-                        <a:cs typeface="Calibri" charset="0"/>
-                      </a:endParaRPr>
                     </a:p>
                   </a:txBody>
                   <a:tcPr anchor="ctr">
@@ -5682,25 +5517,20 @@
                     <a:bodyPr/>
                     <a:lstStyle/>
                     <a:p>
-                      <a:pPr marL="0" indent="0">
-                        <a:buNone/>
+                      <a:pPr>
+                        <a:spcBef>
+                          <a:spcPts val="0"/>
+                        </a:spcBef>
+                        <a:spcAft>
+                          <a:spcPts val="0"/>
+                        </a:spcAft>
                       </a:pPr>
                       <a:r>
-                        <a:rPr lang="en-US" sz="1050" b="1" dirty="0">
-                          <a:solidFill>
-                            <a:srgbClr val="2F6F6B"/>
-                          </a:solidFill>
-                          <a:latin typeface="Calibri" pitchFamily="34" charset="0"/>
-                          <a:ea typeface="Calibri" pitchFamily="34" charset="-122"/>
-                          <a:cs typeface="Calibri" pitchFamily="34" charset="-120"/>
+                        <a:rPr sz="1000" b="1">
+                          <a:latin typeface="Calibri"/>
                         </a:rPr>
-                        <a:t>PATCH</a:t>
+                        <a:t>DELETE</a:t>
                       </a:r>
-                      <a:endParaRPr lang="en-US" sz="1050" dirty="0">
-                        <a:latin typeface="Calibri" charset="0"/>
-                        <a:ea typeface="Calibri" charset="0"/>
-                        <a:cs typeface="Calibri" charset="0"/>
-                      </a:endParaRPr>
                     </a:p>
                   </a:txBody>
                   <a:tcPr anchor="ctr">
@@ -5747,25 +5577,20 @@
                     <a:bodyPr/>
                     <a:lstStyle/>
                     <a:p>
-                      <a:pPr marL="0" indent="0">
-                        <a:buNone/>
+                      <a:pPr>
+                        <a:spcBef>
+                          <a:spcPts val="0"/>
+                        </a:spcBef>
+                        <a:spcAft>
+                          <a:spcPts val="0"/>
+                        </a:spcAft>
                       </a:pPr>
                       <a:r>
-                        <a:rPr lang="en-US" sz="1000" dirty="0">
-                          <a:solidFill>
-                            <a:srgbClr val="8C3B24"/>
-                          </a:solidFill>
-                          <a:latin typeface="Consolas" pitchFamily="34" charset="0"/>
-                          <a:ea typeface="Consolas" pitchFamily="34" charset="-122"/>
-                          <a:cs typeface="Consolas" pitchFamily="34" charset="-120"/>
+                        <a:rPr sz="1000" b="0">
+                          <a:latin typeface="Consolas"/>
                         </a:rPr>
-                        <a:t>/messages/{id}/restore</a:t>
+                        <a:t>/accounts/{user_id}/data</a:t>
                       </a:r>
-                      <a:endParaRPr lang="en-US" sz="1000" dirty="0">
-                        <a:latin typeface="Consolas" charset="0"/>
-                        <a:ea typeface="Consolas" charset="0"/>
-                        <a:cs typeface="Consolas" charset="0"/>
-                      </a:endParaRPr>
                     </a:p>
                   </a:txBody>
                   <a:tcPr anchor="ctr">
@@ -5812,25 +5637,20 @@
                     <a:bodyPr/>
                     <a:lstStyle/>
                     <a:p>
-                      <a:pPr marL="0" indent="0">
-                        <a:buNone/>
+                      <a:pPr>
+                        <a:spcBef>
+                          <a:spcPts val="0"/>
+                        </a:spcBef>
+                        <a:spcAft>
+                          <a:spcPts val="0"/>
+                        </a:spcAft>
                       </a:pPr>
                       <a:r>
-                        <a:rPr lang="en-US" sz="1050" dirty="0">
-                          <a:solidFill>
-                            <a:srgbClr val="1C1A17"/>
-                          </a:solidFill>
-                          <a:latin typeface="Calibri" pitchFamily="34" charset="0"/>
-                          <a:ea typeface="Calibri" pitchFamily="34" charset="-122"/>
-                          <a:cs typeface="Calibri" pitchFamily="34" charset="-120"/>
+                        <a:rPr sz="1000" b="0">
+                          <a:latin typeface="Calibri"/>
                         </a:rPr>
-                        <a:t>Move a message back to the inbox</a:t>
+                        <a:t>Remove account messages and invites (owner token)</a:t>
                       </a:r>
-                      <a:endParaRPr lang="en-US" sz="1050" dirty="0">
-                        <a:latin typeface="Calibri" charset="0"/>
-                        <a:ea typeface="Calibri" charset="0"/>
-                        <a:cs typeface="Calibri" charset="0"/>
-                      </a:endParaRPr>
                     </a:p>
                   </a:txBody>
                   <a:tcPr anchor="ctr">
@@ -5884,25 +5704,20 @@
                     <a:bodyPr/>
                     <a:lstStyle/>
                     <a:p>
-                      <a:pPr marL="0" indent="0">
-                        <a:buNone/>
+                      <a:pPr>
+                        <a:spcBef>
+                          <a:spcPts val="0"/>
+                        </a:spcBef>
+                        <a:spcAft>
+                          <a:spcPts val="0"/>
+                        </a:spcAft>
                       </a:pPr>
                       <a:r>
-                        <a:rPr lang="en-US" sz="1050" dirty="0">
-                          <a:solidFill>
-                            <a:srgbClr val="6B655C"/>
-                          </a:solidFill>
-                          <a:latin typeface="Calibri" pitchFamily="34" charset="0"/>
-                          <a:ea typeface="Calibri" pitchFamily="34" charset="-122"/>
-                          <a:cs typeface="Calibri" pitchFamily="34" charset="-120"/>
+                        <a:rPr sz="1000" b="0">
+                          <a:latin typeface="Calibri"/>
                         </a:rPr>
                         <a:t>message-service</a:t>
                       </a:r>
-                      <a:endParaRPr lang="en-US" sz="1050" dirty="0">
-                        <a:latin typeface="Calibri" charset="0"/>
-                        <a:ea typeface="Calibri" charset="0"/>
-                        <a:cs typeface="Calibri" charset="0"/>
-                      </a:endParaRPr>
                     </a:p>
                   </a:txBody>
                   <a:tcPr anchor="ctr">
@@ -5949,25 +5764,20 @@
                     <a:bodyPr/>
                     <a:lstStyle/>
                     <a:p>
-                      <a:pPr marL="0" indent="0">
-                        <a:buNone/>
+                      <a:pPr>
+                        <a:spcBef>
+                          <a:spcPts val="0"/>
+                        </a:spcBef>
+                        <a:spcAft>
+                          <a:spcPts val="0"/>
+                        </a:spcAft>
                       </a:pPr>
                       <a:r>
-                        <a:rPr lang="en-US" sz="1050" b="1" dirty="0">
-                          <a:solidFill>
-                            <a:srgbClr val="2F6F6B"/>
-                          </a:solidFill>
-                          <a:latin typeface="Calibri" pitchFamily="34" charset="0"/>
-                          <a:ea typeface="Calibri" pitchFamily="34" charset="-122"/>
-                          <a:cs typeface="Calibri" pitchFamily="34" charset="-120"/>
+                        <a:rPr sz="1000" b="1">
+                          <a:latin typeface="Calibri"/>
                         </a:rPr>
-                        <a:t>PATCH</a:t>
+                        <a:t>POST</a:t>
                       </a:r>
-                      <a:endParaRPr lang="en-US" sz="1050" dirty="0">
-                        <a:latin typeface="Calibri" charset="0"/>
-                        <a:ea typeface="Calibri" charset="0"/>
-                        <a:cs typeface="Calibri" charset="0"/>
-                      </a:endParaRPr>
                     </a:p>
                   </a:txBody>
                   <a:tcPr anchor="ctr">
@@ -6014,25 +5824,20 @@
                     <a:bodyPr/>
                     <a:lstStyle/>
                     <a:p>
-                      <a:pPr marL="0" indent="0">
-                        <a:buNone/>
+                      <a:pPr>
+                        <a:spcBef>
+                          <a:spcPts val="0"/>
+                        </a:spcBef>
+                        <a:spcAft>
+                          <a:spcPts val="0"/>
+                        </a:spcAft>
                       </a:pPr>
                       <a:r>
-                        <a:rPr lang="en-US" sz="1000" dirty="0">
-                          <a:solidFill>
-                            <a:srgbClr val="8C3B24"/>
-                          </a:solidFill>
-                          <a:latin typeface="Consolas" pitchFamily="34" charset="0"/>
-                          <a:ea typeface="Consolas" pitchFamily="34" charset="-122"/>
-                          <a:cs typeface="Consolas" pitchFamily="34" charset="-120"/>
+                        <a:rPr sz="1000" b="0">
+                          <a:latin typeface="Consolas"/>
                         </a:rPr>
-                        <a:t>/messages/{id}/reaction</a:t>
+                        <a:t>/messages/invite/{token}</a:t>
                       </a:r>
-                      <a:endParaRPr lang="en-US" sz="1000" dirty="0">
-                        <a:latin typeface="Consolas" charset="0"/>
-                        <a:ea typeface="Consolas" charset="0"/>
-                        <a:cs typeface="Consolas" charset="0"/>
-                      </a:endParaRPr>
                     </a:p>
                   </a:txBody>
                   <a:tcPr anchor="ctr">
@@ -6079,25 +5884,20 @@
                     <a:bodyPr/>
                     <a:lstStyle/>
                     <a:p>
-                      <a:pPr marL="0" indent="0">
-                        <a:buNone/>
+                      <a:pPr>
+                        <a:spcBef>
+                          <a:spcPts val="0"/>
+                        </a:spcBef>
+                        <a:spcAft>
+                          <a:spcPts val="0"/>
+                        </a:spcAft>
                       </a:pPr>
                       <a:r>
-                        <a:rPr lang="en-US" sz="1050" dirty="0">
-                          <a:solidFill>
-                            <a:srgbClr val="1C1A17"/>
-                          </a:solidFill>
-                          <a:latin typeface="Calibri" pitchFamily="34" charset="0"/>
-                          <a:ea typeface="Calibri" pitchFamily="34" charset="-122"/>
-                          <a:cs typeface="Calibri" pitchFamily="34" charset="-120"/>
+                        <a:rPr sz="1000" b="0">
+                          <a:latin typeface="Calibri"/>
                         </a:rPr>
-                        <a:t>Set an emoji reaction</a:t>
+                        <a:t>Submit anonymous notes; active link is reusable</a:t>
                       </a:r>
-                      <a:endParaRPr lang="en-US" sz="1050" dirty="0">
-                        <a:latin typeface="Calibri" charset="0"/>
-                        <a:ea typeface="Calibri" charset="0"/>
-                        <a:cs typeface="Calibri" charset="0"/>
-                      </a:endParaRPr>
                     </a:p>
                   </a:txBody>
                   <a:tcPr anchor="ctr">
@@ -6151,25 +5951,20 @@
                     <a:bodyPr/>
                     <a:lstStyle/>
                     <a:p>
-                      <a:pPr marL="0" indent="0">
-                        <a:buNone/>
+                      <a:pPr>
+                        <a:spcBef>
+                          <a:spcPts val="0"/>
+                        </a:spcBef>
+                        <a:spcAft>
+                          <a:spcPts val="0"/>
+                        </a:spcAft>
                       </a:pPr>
                       <a:r>
-                        <a:rPr lang="en-US" sz="1050" dirty="0">
-                          <a:solidFill>
-                            <a:srgbClr val="6B655C"/>
-                          </a:solidFill>
-                          <a:latin typeface="Calibri" pitchFamily="34" charset="0"/>
-                          <a:ea typeface="Calibri" pitchFamily="34" charset="-122"/>
-                          <a:cs typeface="Calibri" pitchFamily="34" charset="-120"/>
+                        <a:rPr sz="1000" b="0">
+                          <a:latin typeface="Calibri"/>
                         </a:rPr>
                         <a:t>message-service</a:t>
                       </a:r>
-                      <a:endParaRPr lang="en-US" sz="1050" dirty="0">
-                        <a:latin typeface="Calibri" charset="0"/>
-                        <a:ea typeface="Calibri" charset="0"/>
-                        <a:cs typeface="Calibri" charset="0"/>
-                      </a:endParaRPr>
                     </a:p>
                   </a:txBody>
                   <a:tcPr anchor="ctr">
@@ -6216,25 +6011,20 @@
                     <a:bodyPr/>
                     <a:lstStyle/>
                     <a:p>
-                      <a:pPr marL="0" indent="0">
-                        <a:buNone/>
+                      <a:pPr>
+                        <a:spcBef>
+                          <a:spcPts val="0"/>
+                        </a:spcBef>
+                        <a:spcAft>
+                          <a:spcPts val="0"/>
+                        </a:spcAft>
                       </a:pPr>
                       <a:r>
-                        <a:rPr lang="en-US" sz="1050" b="1" dirty="0">
-                          <a:solidFill>
-                            <a:srgbClr val="2F6F6B"/>
-                          </a:solidFill>
-                          <a:latin typeface="Calibri" pitchFamily="34" charset="0"/>
-                          <a:ea typeface="Calibri" pitchFamily="34" charset="-122"/>
-                          <a:cs typeface="Calibri" pitchFamily="34" charset="-120"/>
+                        <a:rPr sz="1000" b="1">
+                          <a:latin typeface="Calibri"/>
                         </a:rPr>
-                        <a:t>PATCH</a:t>
+                        <a:t>GET</a:t>
                       </a:r>
-                      <a:endParaRPr lang="en-US" sz="1050" dirty="0">
-                        <a:latin typeface="Calibri" charset="0"/>
-                        <a:ea typeface="Calibri" charset="0"/>
-                        <a:cs typeface="Calibri" charset="0"/>
-                      </a:endParaRPr>
                     </a:p>
                   </a:txBody>
                   <a:tcPr anchor="ctr">
@@ -6281,25 +6071,20 @@
                     <a:bodyPr/>
                     <a:lstStyle/>
                     <a:p>
-                      <a:pPr marL="0" indent="0">
-                        <a:buNone/>
+                      <a:pPr>
+                        <a:spcBef>
+                          <a:spcPts val="0"/>
+                        </a:spcBef>
+                        <a:spcAft>
+                          <a:spcPts val="0"/>
+                        </a:spcAft>
                       </a:pPr>
                       <a:r>
-                        <a:rPr lang="en-US" sz="1000" dirty="0">
-                          <a:solidFill>
-                            <a:srgbClr val="8C3B24"/>
-                          </a:solidFill>
-                          <a:latin typeface="Consolas" pitchFamily="34" charset="0"/>
-                          <a:ea typeface="Consolas" pitchFamily="34" charset="-122"/>
-                          <a:cs typeface="Consolas" pitchFamily="34" charset="-120"/>
+                        <a:rPr sz="1000" b="0">
+                          <a:latin typeface="Consolas"/>
                         </a:rPr>
-                        <a:t>/messages/{id}/reply</a:t>
+                        <a:t>/messages/token/{token}</a:t>
                       </a:r>
-                      <a:endParaRPr lang="en-US" sz="1000" dirty="0">
-                        <a:latin typeface="Consolas" charset="0"/>
-                        <a:ea typeface="Consolas" charset="0"/>
-                        <a:cs typeface="Consolas" charset="0"/>
-                      </a:endParaRPr>
                     </a:p>
                   </a:txBody>
                   <a:tcPr anchor="ctr">
@@ -6346,25 +6131,20 @@
                     <a:bodyPr/>
                     <a:lstStyle/>
                     <a:p>
-                      <a:pPr marL="0" indent="0">
-                        <a:buNone/>
+                      <a:pPr>
+                        <a:spcBef>
+                          <a:spcPts val="0"/>
+                        </a:spcBef>
+                        <a:spcAft>
+                          <a:spcPts val="0"/>
+                        </a:spcAft>
                       </a:pPr>
                       <a:r>
-                        <a:rPr lang="en-US" sz="1050" dirty="0">
-                          <a:solidFill>
-                            <a:srgbClr val="1C1A17"/>
-                          </a:solidFill>
-                          <a:latin typeface="Calibri" pitchFamily="34" charset="0"/>
-                          <a:ea typeface="Calibri" pitchFamily="34" charset="-122"/>
-                          <a:cs typeface="Calibri" pitchFamily="34" charset="-120"/>
+                        <a:rPr sz="1000" b="0">
+                          <a:latin typeface="Calibri"/>
                         </a:rPr>
-                        <a:t>Send a reply to the sender</a:t>
+                        <a:t>Check private reply status</a:t>
                       </a:r>
-                      <a:endParaRPr lang="en-US" sz="1050" dirty="0">
-                        <a:latin typeface="Calibri" charset="0"/>
-                        <a:ea typeface="Calibri" charset="0"/>
-                        <a:cs typeface="Calibri" charset="0"/>
-                      </a:endParaRPr>
                     </a:p>
                   </a:txBody>
                   <a:tcPr anchor="ctr">
@@ -6418,25 +6198,20 @@
                     <a:bodyPr/>
                     <a:lstStyle/>
                     <a:p>
-                      <a:pPr marL="0" indent="0">
-                        <a:buNone/>
+                      <a:pPr>
+                        <a:spcBef>
+                          <a:spcPts val="0"/>
+                        </a:spcBef>
+                        <a:spcAft>
+                          <a:spcPts val="0"/>
+                        </a:spcAft>
                       </a:pPr>
                       <a:r>
-                        <a:rPr lang="en-US" sz="1050" dirty="0">
-                          <a:solidFill>
-                            <a:srgbClr val="6B655C"/>
-                          </a:solidFill>
-                          <a:latin typeface="Calibri" pitchFamily="34" charset="0"/>
-                          <a:ea typeface="Calibri" pitchFamily="34" charset="-122"/>
-                          <a:cs typeface="Calibri" pitchFamily="34" charset="-120"/>
+                        <a:rPr sz="1000" b="0">
+                          <a:latin typeface="Calibri"/>
                         </a:rPr>
                         <a:t>message-service</a:t>
                       </a:r>
-                      <a:endParaRPr lang="en-US" sz="1050" dirty="0">
-                        <a:latin typeface="Calibri" charset="0"/>
-                        <a:ea typeface="Calibri" charset="0"/>
-                        <a:cs typeface="Calibri" charset="0"/>
-                      </a:endParaRPr>
                     </a:p>
                   </a:txBody>
                   <a:tcPr anchor="ctr">
@@ -6483,25 +6258,20 @@
                     <a:bodyPr/>
                     <a:lstStyle/>
                     <a:p>
-                      <a:pPr marL="0" indent="0">
-                        <a:buNone/>
+                      <a:pPr>
+                        <a:spcBef>
+                          <a:spcPts val="0"/>
+                        </a:spcBef>
+                        <a:spcAft>
+                          <a:spcPts val="0"/>
+                        </a:spcAft>
                       </a:pPr>
                       <a:r>
-                        <a:rPr lang="en-US" sz="1050" b="1" dirty="0">
-                          <a:solidFill>
-                            <a:srgbClr val="2F6F6B"/>
-                          </a:solidFill>
-                          <a:latin typeface="Calibri" pitchFamily="34" charset="0"/>
-                          <a:ea typeface="Calibri" pitchFamily="34" charset="-122"/>
-                          <a:cs typeface="Calibri" pitchFamily="34" charset="-120"/>
+                        <a:rPr sz="1000" b="1">
+                          <a:latin typeface="Calibri"/>
                         </a:rPr>
-                        <a:t>PATCH</a:t>
+                        <a:t>GET</a:t>
                       </a:r>
-                      <a:endParaRPr lang="en-US" sz="1050" dirty="0">
-                        <a:latin typeface="Calibri" charset="0"/>
-                        <a:ea typeface="Calibri" charset="0"/>
-                        <a:cs typeface="Calibri" charset="0"/>
-                      </a:endParaRPr>
                     </a:p>
                   </a:txBody>
                   <a:tcPr anchor="ctr">
@@ -6548,25 +6318,20 @@
                     <a:bodyPr/>
                     <a:lstStyle/>
                     <a:p>
-                      <a:pPr marL="0" indent="0">
-                        <a:buNone/>
+                      <a:pPr>
+                        <a:spcBef>
+                          <a:spcPts val="0"/>
+                        </a:spcBef>
+                        <a:spcAft>
+                          <a:spcPts val="0"/>
+                        </a:spcAft>
                       </a:pPr>
                       <a:r>
-                        <a:rPr lang="en-US" sz="1000" dirty="0">
-                          <a:solidFill>
-                            <a:srgbClr val="8C3B24"/>
-                          </a:solidFill>
-                          <a:latin typeface="Consolas" pitchFamily="34" charset="0"/>
-                          <a:ea typeface="Consolas" pitchFamily="34" charset="-122"/>
-                          <a:cs typeface="Consolas" pitchFamily="34" charset="-120"/>
+                        <a:rPr sz="1000" b="0">
+                          <a:latin typeface="Consolas"/>
                         </a:rPr>
-                        <a:t>/messages/{id}/report</a:t>
+                        <a:t>/messages/{user_id}</a:t>
                       </a:r>
-                      <a:endParaRPr lang="en-US" sz="1000" dirty="0">
-                        <a:latin typeface="Consolas" charset="0"/>
-                        <a:ea typeface="Consolas" charset="0"/>
-                        <a:cs typeface="Consolas" charset="0"/>
-                      </a:endParaRPr>
                     </a:p>
                   </a:txBody>
                   <a:tcPr anchor="ctr">
@@ -6613,25 +6378,20 @@
                     <a:bodyPr/>
                     <a:lstStyle/>
                     <a:p>
-                      <a:pPr marL="0" indent="0">
-                        <a:buNone/>
+                      <a:pPr>
+                        <a:spcBef>
+                          <a:spcPts val="0"/>
+                        </a:spcBef>
+                        <a:spcAft>
+                          <a:spcPts val="0"/>
+                        </a:spcAft>
                       </a:pPr>
                       <a:r>
-                        <a:rPr lang="en-US" sz="1050" dirty="0">
-                          <a:solidFill>
-                            <a:srgbClr val="1C1A17"/>
-                          </a:solidFill>
-                          <a:latin typeface="Calibri" pitchFamily="34" charset="0"/>
-                          <a:ea typeface="Calibri" pitchFamily="34" charset="-122"/>
-                          <a:cs typeface="Calibri" pitchFamily="34" charset="-120"/>
+                        <a:rPr sz="1000" b="0">
+                          <a:latin typeface="Calibri"/>
                         </a:rPr>
-                        <a:t>Flag a message as reported</a:t>
+                        <a:t>Read inbox (owner token)</a:t>
                       </a:r>
-                      <a:endParaRPr lang="en-US" sz="1050" dirty="0">
-                        <a:latin typeface="Calibri" charset="0"/>
-                        <a:ea typeface="Calibri" charset="0"/>
-                        <a:cs typeface="Calibri" charset="0"/>
-                      </a:endParaRPr>
                     </a:p>
                   </a:txBody>
                   <a:tcPr anchor="ctr">
@@ -6685,25 +6445,20 @@
                     <a:bodyPr/>
                     <a:lstStyle/>
                     <a:p>
-                      <a:pPr marL="0" indent="0">
-                        <a:buNone/>
+                      <a:pPr>
+                        <a:spcBef>
+                          <a:spcPts val="0"/>
+                        </a:spcBef>
+                        <a:spcAft>
+                          <a:spcPts val="0"/>
+                        </a:spcAft>
                       </a:pPr>
                       <a:r>
-                        <a:rPr lang="en-US" sz="1050" dirty="0">
-                          <a:solidFill>
-                            <a:srgbClr val="6B655C"/>
-                          </a:solidFill>
-                          <a:latin typeface="Calibri" pitchFamily="34" charset="0"/>
-                          <a:ea typeface="Calibri" pitchFamily="34" charset="-122"/>
-                          <a:cs typeface="Calibri" pitchFamily="34" charset="-120"/>
+                        <a:rPr sz="1000" b="0">
+                          <a:latin typeface="Calibri"/>
                         </a:rPr>
                         <a:t>message-service</a:t>
                       </a:r>
-                      <a:endParaRPr lang="en-US" sz="1050" dirty="0">
-                        <a:latin typeface="Calibri" charset="0"/>
-                        <a:ea typeface="Calibri" charset="0"/>
-                        <a:cs typeface="Calibri" charset="0"/>
-                      </a:endParaRPr>
                     </a:p>
                   </a:txBody>
                   <a:tcPr anchor="ctr">
@@ -6750,25 +6505,20 @@
                     <a:bodyPr/>
                     <a:lstStyle/>
                     <a:p>
-                      <a:pPr marL="0" indent="0">
-                        <a:buNone/>
+                      <a:pPr>
+                        <a:spcBef>
+                          <a:spcPts val="0"/>
+                        </a:spcBef>
+                        <a:spcAft>
+                          <a:spcPts val="0"/>
+                        </a:spcAft>
                       </a:pPr>
                       <a:r>
-                        <a:rPr lang="en-US" sz="1050" b="1" dirty="0">
-                          <a:solidFill>
-                            <a:srgbClr val="2F6F6B"/>
-                          </a:solidFill>
-                          <a:latin typeface="Calibri" pitchFamily="34" charset="0"/>
-                          <a:ea typeface="Calibri" pitchFamily="34" charset="-122"/>
-                          <a:cs typeface="Calibri" pitchFamily="34" charset="-120"/>
+                        <a:rPr sz="1000" b="1">
+                          <a:latin typeface="Calibri"/>
                         </a:rPr>
-                        <a:t>DELETE</a:t>
+                        <a:t>PATCH · DELETE</a:t>
                       </a:r>
-                      <a:endParaRPr lang="en-US" sz="1050" dirty="0">
-                        <a:latin typeface="Calibri" charset="0"/>
-                        <a:ea typeface="Calibri" charset="0"/>
-                        <a:cs typeface="Calibri" charset="0"/>
-                      </a:endParaRPr>
                     </a:p>
                   </a:txBody>
                   <a:tcPr anchor="ctr">
@@ -6815,25 +6565,20 @@
                     <a:bodyPr/>
                     <a:lstStyle/>
                     <a:p>
-                      <a:pPr marL="0" indent="0">
-                        <a:buNone/>
+                      <a:pPr>
+                        <a:spcBef>
+                          <a:spcPts val="0"/>
+                        </a:spcBef>
+                        <a:spcAft>
+                          <a:spcPts val="0"/>
+                        </a:spcAft>
                       </a:pPr>
                       <a:r>
-                        <a:rPr lang="en-US" sz="1000" dirty="0">
-                          <a:solidFill>
-                            <a:srgbClr val="8C3B24"/>
-                          </a:solidFill>
-                          <a:latin typeface="Consolas" pitchFamily="34" charset="0"/>
-                          <a:ea typeface="Consolas" pitchFamily="34" charset="-122"/>
-                          <a:cs typeface="Consolas" pitchFamily="34" charset="-120"/>
+                        <a:rPr sz="1000" b="0">
+                          <a:latin typeface="Consolas"/>
                         </a:rPr>
-                        <a:t>/messages/{id}</a:t>
+                        <a:t>/messages/{message_id}/...</a:t>
                       </a:r>
-                      <a:endParaRPr lang="en-US" sz="1000" dirty="0">
-                        <a:latin typeface="Consolas" charset="0"/>
-                        <a:ea typeface="Consolas" charset="0"/>
-                        <a:cs typeface="Consolas" charset="0"/>
-                      </a:endParaRPr>
                     </a:p>
                   </a:txBody>
                   <a:tcPr anchor="ctr">
@@ -6880,25 +6625,20 @@
                     <a:bodyPr/>
                     <a:lstStyle/>
                     <a:p>
-                      <a:pPr marL="0" indent="0">
-                        <a:buNone/>
+                      <a:pPr>
+                        <a:spcBef>
+                          <a:spcPts val="0"/>
+                        </a:spcBef>
+                        <a:spcAft>
+                          <a:spcPts val="0"/>
+                        </a:spcAft>
                       </a:pPr>
                       <a:r>
-                        <a:rPr lang="en-US" sz="1050" dirty="0">
-                          <a:solidFill>
-                            <a:srgbClr val="1C1A17"/>
-                          </a:solidFill>
-                          <a:latin typeface="Calibri" pitchFamily="34" charset="0"/>
-                          <a:ea typeface="Calibri" pitchFamily="34" charset="-122"/>
-                          <a:cs typeface="Calibri" pitchFamily="34" charset="-120"/>
+                        <a:rPr sz="1000" b="0">
+                          <a:latin typeface="Calibri"/>
                         </a:rPr>
-                        <a:t>Permanently delete a message</a:t>
+                        <a:t>Manage or permanently delete messages</a:t>
                       </a:r>
-                      <a:endParaRPr lang="en-US" sz="1050" dirty="0">
-                        <a:latin typeface="Calibri" charset="0"/>
-                        <a:ea typeface="Calibri" charset="0"/>
-                        <a:cs typeface="Calibri" charset="0"/>
-                      </a:endParaRPr>
                     </a:p>
                   </a:txBody>
                   <a:tcPr anchor="ctr">
@@ -6983,7 +6723,7 @@
                 <a:ea typeface="Calibri" pitchFamily="34" charset="-122"/>
                 <a:cs typeface="Calibri" pitchFamily="34" charset="-120"/>
               </a:rPr>
-              <a:t>4 / 8</a:t>
+              <a:t>4 / 9</a:t>
             </a:r>
             <a:endParaRPr lang="en-US" sz="1000" dirty="0"/>
           </a:p>
@@ -7803,7 +7543,7 @@
                 <a:ea typeface="Calibri" pitchFamily="34" charset="-122"/>
                 <a:cs typeface="Calibri" pitchFamily="34" charset="-120"/>
               </a:rPr>
-              <a:t>One database per service — each owns its own data, no shared tables.</a:t>
+              <a:t>Each service owns a local SQLite database; owner APIs use signed password-authenticated sessions.</a:t>
             </a:r>
             <a:endParaRPr lang="en-US" sz="1100" dirty="0"/>
           </a:p>
@@ -7989,7 +7729,7 @@
                 <a:ea typeface="Calibri" pitchFamily="34" charset="-122"/>
                 <a:cs typeface="Calibri" pitchFamily="34" charset="-120"/>
               </a:rPr>
-              <a:t>The dashboard creates one reusable link; Outlook opens a draft for sharing.</a:t>
+              <a:t>Create a reusable invite; the dashboard restores the saved link after sign-in.</a:t>
             </a:r>
             <a:endParaRPr lang="en-US" sz="1100" dirty="0"/>
           </a:p>
@@ -8136,7 +7876,7 @@
                 <a:ea typeface="Calibri" pitchFamily="34" charset="-122"/>
                 <a:cs typeface="Calibri" pitchFamily="34" charset="-120"/>
               </a:rPr>
-              <a:t>The feedback form posts through the invite link; the same link can accept multiple notes.</a:t>
+              <a:t>Submitting is anonymous; generating a replacement invalidates the previous link.</a:t>
             </a:r>
             <a:endParaRPr lang="en-US" sz="1100" dirty="0"/>
           </a:p>
@@ -8430,7 +8170,7 @@
                 <a:ea typeface="Calibri" pitchFamily="34" charset="-122"/>
                 <a:cs typeface="Calibri" pitchFamily="34" charset="-120"/>
               </a:rPr>
-              <a:t>The owner manages replies; the sender page polls for updates and keeps the link copyable.</a:t>
+              <a:t>Owners manage feedback; account deletion removes messages and invite links too.</a:t>
             </a:r>
             <a:endParaRPr lang="en-US" sz="1100" dirty="0"/>
           </a:p>
@@ -8722,7 +8462,7 @@
                 <a:ea typeface="Calibri" pitchFamily="34" charset="-122"/>
                 <a:cs typeface="Calibri" pitchFamily="34" charset="-120"/>
               </a:rPr>
-              <a:t>Zero-downtime schema changes</a:t>
+              <a:t>Local-only development</a:t>
             </a:r>
             <a:endParaRPr lang="en-US" sz="950" dirty="0"/>
           </a:p>
@@ -8761,7 +8501,7 @@
                 <a:ea typeface="Calibri" pitchFamily="34" charset="-122"/>
                 <a:cs typeface="Calibri" pitchFamily="34" charset="-120"/>
               </a:rPr>
-              <a:t>5 / 8</a:t>
+              <a:t>5 / 9</a:t>
             </a:r>
             <a:endParaRPr lang="en-US" sz="1000" dirty="0"/>
           </a:p>
@@ -8900,7 +8640,7 @@
                 <a:ea typeface="Calibri" pitchFamily="34" charset="-122"/>
                 <a:cs typeface="Calibri" pitchFamily="34" charset="-120"/>
               </a:rPr>
-              <a:t>Optional AI features run with Ollama; public invite URLs require deployment.</a:t>
+              <a:t>Password-protected owner access, anonymous invites, and local-only services.</a:t>
             </a:r>
             <a:endParaRPr lang="en-US" sz="1400" dirty="0"/>
           </a:p>
@@ -9361,30 +9101,6 @@
               </a:lnSpc>
               <a:buNone/>
             </a:pPr>
-            <a:r>
-              <a:rPr sz="1400" dirty="0">
-                <a:solidFill>
-                  <a:schemeClr val="bg2"/>
-                </a:solidFill>
-              </a:rPr>
-              <a:t>Verified tests: Frontend 53 · Message API 96 · User API 26 (175 total). Outlook opens a draf</a:t>
-            </a:r>
-            <a:r>
-              <a:rPr lang="en-US" sz="1400" dirty="0">
-                <a:solidFill>
-                  <a:schemeClr val="bg2"/>
-                </a:solidFill>
-              </a:rPr>
-              <a:t>t</a:t>
-            </a:r>
-            <a:r>
-              <a:rPr sz="1400" dirty="0">
-                <a:solidFill>
-                  <a:schemeClr val="bg2"/>
-                </a:solidFill>
-              </a:rPr>
-              <a:t>.</a:t>
-            </a:r>
             <a:endParaRPr lang="en-US" sz="1400" dirty="0">
               <a:solidFill>
                 <a:schemeClr val="bg2"/>
@@ -9426,9 +9142,563 @@
                 <a:ea typeface="Calibri" pitchFamily="34" charset="-122"/>
                 <a:cs typeface="Calibri" pitchFamily="34" charset="-120"/>
               </a:rPr>
-              <a:t>6 / 8</a:t>
+              <a:t>6 / 9</a:t>
             </a:r>
             <a:endParaRPr lang="en-US" sz="1000" dirty="0"/>
+          </a:p>
+        </p:txBody>
+      </p:sp>
+      <p:sp>
+        <p:nvSpPr>
+          <p:cNvPr id="21" name="TextBox 20"/>
+          <p:cNvSpPr txBox="1"/>
+          <p:nvPr/>
+        </p:nvSpPr>
+        <p:spPr>
+          <a:xfrm>
+            <a:off x="658368" y="5001768"/>
+            <a:ext cx="4572000" cy="201168"/>
+          </a:xfrm>
+          <a:prstGeom prst="rect">
+            <a:avLst/>
+          </a:prstGeom>
+          <a:noFill/>
+        </p:spPr>
+        <p:txBody>
+          <a:bodyPr wrap="none">
+            <a:spAutoFit/>
+          </a:bodyPr>
+          <a:lstStyle/>
+          <a:p>
+            <a:pPr>
+              <a:spcBef>
+                <a:spcPts val="0"/>
+              </a:spcBef>
+              <a:spcAft>
+                <a:spcPts val="0"/>
+              </a:spcAft>
+            </a:pPr>
+            <a:r>
+              <a:rPr sz="900" b="1">
+                <a:solidFill>
+                  <a:srgbClr val="CF9F3F"/>
+                </a:solidFill>
+                <a:latin typeface="Calibri"/>
+              </a:rPr>
+              <a:t>AUTOMATED TEST COVERAGE</a:t>
+            </a:r>
+          </a:p>
+        </p:txBody>
+      </p:sp>
+      <p:sp>
+        <p:nvSpPr>
+          <p:cNvPr id="22" name="Rounded Rectangle 21"/>
+          <p:cNvSpPr/>
+          <p:nvPr/>
+        </p:nvSpPr>
+        <p:spPr>
+          <a:xfrm>
+            <a:off x="548640" y="5285232"/>
+            <a:ext cx="2615184" cy="841248"/>
+          </a:xfrm>
+          <a:prstGeom prst="roundRect">
+            <a:avLst/>
+          </a:prstGeom>
+          <a:solidFill>
+            <a:srgbClr val="3A332B"/>
+          </a:solidFill>
+          <a:ln>
+            <a:noFill/>
+          </a:ln>
+        </p:spPr>
+        <p:style>
+          <a:lnRef idx="1">
+            <a:schemeClr val="accent1"/>
+          </a:lnRef>
+          <a:fillRef idx="3">
+            <a:schemeClr val="accent1"/>
+          </a:fillRef>
+          <a:effectRef idx="2">
+            <a:schemeClr val="accent1"/>
+          </a:effectRef>
+          <a:fontRef idx="minor">
+            <a:schemeClr val="lt1"/>
+          </a:fontRef>
+        </p:style>
+        <p:txBody>
+          <a:bodyPr rtlCol="0" anchor="ctr"/>
+          <a:lstStyle/>
+          <a:p>
+            <a:pPr algn="ctr"/>
+            <a:endParaRPr/>
+          </a:p>
+        </p:txBody>
+      </p:sp>
+      <p:sp>
+        <p:nvSpPr>
+          <p:cNvPr id="23" name="TextBox 22"/>
+          <p:cNvSpPr txBox="1"/>
+          <p:nvPr/>
+        </p:nvSpPr>
+        <p:spPr>
+          <a:xfrm>
+            <a:off x="713232" y="5349240"/>
+            <a:ext cx="2286000" cy="393192"/>
+          </a:xfrm>
+          <a:prstGeom prst="rect">
+            <a:avLst/>
+          </a:prstGeom>
+          <a:noFill/>
+        </p:spPr>
+        <p:txBody>
+          <a:bodyPr wrap="none" anchor="ctr">
+            <a:spAutoFit/>
+          </a:bodyPr>
+          <a:lstStyle/>
+          <a:p>
+            <a:pPr algn="ctr">
+              <a:spcBef>
+                <a:spcPts val="0"/>
+              </a:spcBef>
+              <a:spcAft>
+                <a:spcPts val="0"/>
+              </a:spcAft>
+            </a:pPr>
+            <a:r>
+              <a:rPr sz="2300" b="1">
+                <a:solidFill>
+                  <a:srgbClr val="E3BD62"/>
+                </a:solidFill>
+                <a:latin typeface="Bookman Old Style"/>
+              </a:rPr>
+              <a:t>58</a:t>
+            </a:r>
+          </a:p>
+        </p:txBody>
+      </p:sp>
+      <p:sp>
+        <p:nvSpPr>
+          <p:cNvPr id="24" name="TextBox 23"/>
+          <p:cNvSpPr txBox="1"/>
+          <p:nvPr/>
+        </p:nvSpPr>
+        <p:spPr>
+          <a:xfrm>
+            <a:off x="658368" y="5760720"/>
+            <a:ext cx="2395728" cy="228600"/>
+          </a:xfrm>
+          <a:prstGeom prst="rect">
+            <a:avLst/>
+          </a:prstGeom>
+          <a:noFill/>
+        </p:spPr>
+        <p:txBody>
+          <a:bodyPr wrap="none" anchor="ctr">
+            <a:spAutoFit/>
+          </a:bodyPr>
+          <a:lstStyle/>
+          <a:p>
+            <a:pPr algn="ctr">
+              <a:spcBef>
+                <a:spcPts val="0"/>
+              </a:spcBef>
+              <a:spcAft>
+                <a:spcPts val="0"/>
+              </a:spcAft>
+            </a:pPr>
+            <a:r>
+              <a:rPr sz="1000">
+                <a:solidFill>
+                  <a:srgbClr val="F6F3EE"/>
+                </a:solidFill>
+                <a:latin typeface="Calibri"/>
+              </a:rPr>
+              <a:t>Frontend</a:t>
+            </a:r>
+          </a:p>
+        </p:txBody>
+      </p:sp>
+      <p:sp>
+        <p:nvSpPr>
+          <p:cNvPr id="25" name="Rounded Rectangle 24"/>
+          <p:cNvSpPr/>
+          <p:nvPr/>
+        </p:nvSpPr>
+        <p:spPr>
+          <a:xfrm>
+            <a:off x="3364992" y="5285232"/>
+            <a:ext cx="2615184" cy="841248"/>
+          </a:xfrm>
+          <a:prstGeom prst="roundRect">
+            <a:avLst/>
+          </a:prstGeom>
+          <a:solidFill>
+            <a:srgbClr val="3A332B"/>
+          </a:solidFill>
+          <a:ln>
+            <a:noFill/>
+          </a:ln>
+        </p:spPr>
+        <p:style>
+          <a:lnRef idx="1">
+            <a:schemeClr val="accent1"/>
+          </a:lnRef>
+          <a:fillRef idx="3">
+            <a:schemeClr val="accent1"/>
+          </a:fillRef>
+          <a:effectRef idx="2">
+            <a:schemeClr val="accent1"/>
+          </a:effectRef>
+          <a:fontRef idx="minor">
+            <a:schemeClr val="lt1"/>
+          </a:fontRef>
+        </p:style>
+        <p:txBody>
+          <a:bodyPr rtlCol="0" anchor="ctr"/>
+          <a:lstStyle/>
+          <a:p>
+            <a:pPr algn="ctr"/>
+            <a:endParaRPr/>
+          </a:p>
+        </p:txBody>
+      </p:sp>
+      <p:sp>
+        <p:nvSpPr>
+          <p:cNvPr id="26" name="TextBox 25"/>
+          <p:cNvSpPr txBox="1"/>
+          <p:nvPr/>
+        </p:nvSpPr>
+        <p:spPr>
+          <a:xfrm>
+            <a:off x="3529584" y="5349240"/>
+            <a:ext cx="2286000" cy="393192"/>
+          </a:xfrm>
+          <a:prstGeom prst="rect">
+            <a:avLst/>
+          </a:prstGeom>
+          <a:noFill/>
+        </p:spPr>
+        <p:txBody>
+          <a:bodyPr wrap="none" anchor="ctr">
+            <a:spAutoFit/>
+          </a:bodyPr>
+          <a:lstStyle/>
+          <a:p>
+            <a:pPr algn="ctr">
+              <a:spcBef>
+                <a:spcPts val="0"/>
+              </a:spcBef>
+              <a:spcAft>
+                <a:spcPts val="0"/>
+              </a:spcAft>
+            </a:pPr>
+            <a:r>
+              <a:rPr sz="2300" b="1">
+                <a:solidFill>
+                  <a:srgbClr val="E3BD62"/>
+                </a:solidFill>
+                <a:latin typeface="Bookman Old Style"/>
+              </a:rPr>
+              <a:t>109</a:t>
+            </a:r>
+          </a:p>
+        </p:txBody>
+      </p:sp>
+      <p:sp>
+        <p:nvSpPr>
+          <p:cNvPr id="27" name="TextBox 26"/>
+          <p:cNvSpPr txBox="1"/>
+          <p:nvPr/>
+        </p:nvSpPr>
+        <p:spPr>
+          <a:xfrm>
+            <a:off x="3474720" y="5760720"/>
+            <a:ext cx="2395728" cy="228600"/>
+          </a:xfrm>
+          <a:prstGeom prst="rect">
+            <a:avLst/>
+          </a:prstGeom>
+          <a:noFill/>
+        </p:spPr>
+        <p:txBody>
+          <a:bodyPr wrap="none" anchor="ctr">
+            <a:spAutoFit/>
+          </a:bodyPr>
+          <a:lstStyle/>
+          <a:p>
+            <a:pPr algn="ctr">
+              <a:spcBef>
+                <a:spcPts val="0"/>
+              </a:spcBef>
+              <a:spcAft>
+                <a:spcPts val="0"/>
+              </a:spcAft>
+            </a:pPr>
+            <a:r>
+              <a:rPr sz="1000">
+                <a:solidFill>
+                  <a:srgbClr val="F6F3EE"/>
+                </a:solidFill>
+                <a:latin typeface="Calibri"/>
+              </a:rPr>
+              <a:t>Message API</a:t>
+            </a:r>
+          </a:p>
+        </p:txBody>
+      </p:sp>
+      <p:sp>
+        <p:nvSpPr>
+          <p:cNvPr id="28" name="Rounded Rectangle 27"/>
+          <p:cNvSpPr/>
+          <p:nvPr/>
+        </p:nvSpPr>
+        <p:spPr>
+          <a:xfrm>
+            <a:off x="6181344" y="5285232"/>
+            <a:ext cx="2615184" cy="841248"/>
+          </a:xfrm>
+          <a:prstGeom prst="roundRect">
+            <a:avLst/>
+          </a:prstGeom>
+          <a:solidFill>
+            <a:srgbClr val="3A332B"/>
+          </a:solidFill>
+          <a:ln>
+            <a:noFill/>
+          </a:ln>
+        </p:spPr>
+        <p:style>
+          <a:lnRef idx="1">
+            <a:schemeClr val="accent1"/>
+          </a:lnRef>
+          <a:fillRef idx="3">
+            <a:schemeClr val="accent1"/>
+          </a:fillRef>
+          <a:effectRef idx="2">
+            <a:schemeClr val="accent1"/>
+          </a:effectRef>
+          <a:fontRef idx="minor">
+            <a:schemeClr val="lt1"/>
+          </a:fontRef>
+        </p:style>
+        <p:txBody>
+          <a:bodyPr rtlCol="0" anchor="ctr"/>
+          <a:lstStyle/>
+          <a:p>
+            <a:pPr algn="ctr"/>
+            <a:endParaRPr/>
+          </a:p>
+        </p:txBody>
+      </p:sp>
+      <p:sp>
+        <p:nvSpPr>
+          <p:cNvPr id="29" name="TextBox 28"/>
+          <p:cNvSpPr txBox="1"/>
+          <p:nvPr/>
+        </p:nvSpPr>
+        <p:spPr>
+          <a:xfrm>
+            <a:off x="6345936" y="5349240"/>
+            <a:ext cx="2286000" cy="393192"/>
+          </a:xfrm>
+          <a:prstGeom prst="rect">
+            <a:avLst/>
+          </a:prstGeom>
+          <a:noFill/>
+        </p:spPr>
+        <p:txBody>
+          <a:bodyPr wrap="none" anchor="ctr">
+            <a:spAutoFit/>
+          </a:bodyPr>
+          <a:lstStyle/>
+          <a:p>
+            <a:pPr algn="ctr">
+              <a:spcBef>
+                <a:spcPts val="0"/>
+              </a:spcBef>
+              <a:spcAft>
+                <a:spcPts val="0"/>
+              </a:spcAft>
+            </a:pPr>
+            <a:r>
+              <a:rPr sz="2300" b="1">
+                <a:solidFill>
+                  <a:srgbClr val="E3BD62"/>
+                </a:solidFill>
+                <a:latin typeface="Bookman Old Style"/>
+              </a:rPr>
+              <a:t>34</a:t>
+            </a:r>
+          </a:p>
+        </p:txBody>
+      </p:sp>
+      <p:sp>
+        <p:nvSpPr>
+          <p:cNvPr id="30" name="TextBox 29"/>
+          <p:cNvSpPr txBox="1"/>
+          <p:nvPr/>
+        </p:nvSpPr>
+        <p:spPr>
+          <a:xfrm>
+            <a:off x="6291072" y="5760720"/>
+            <a:ext cx="2395728" cy="228600"/>
+          </a:xfrm>
+          <a:prstGeom prst="rect">
+            <a:avLst/>
+          </a:prstGeom>
+          <a:noFill/>
+        </p:spPr>
+        <p:txBody>
+          <a:bodyPr wrap="none" anchor="ctr">
+            <a:spAutoFit/>
+          </a:bodyPr>
+          <a:lstStyle/>
+          <a:p>
+            <a:pPr algn="ctr">
+              <a:spcBef>
+                <a:spcPts val="0"/>
+              </a:spcBef>
+              <a:spcAft>
+                <a:spcPts val="0"/>
+              </a:spcAft>
+            </a:pPr>
+            <a:r>
+              <a:rPr sz="1000">
+                <a:solidFill>
+                  <a:srgbClr val="F6F3EE"/>
+                </a:solidFill>
+                <a:latin typeface="Calibri"/>
+              </a:rPr>
+              <a:t>User API</a:t>
+            </a:r>
+          </a:p>
+        </p:txBody>
+      </p:sp>
+      <p:sp>
+        <p:nvSpPr>
+          <p:cNvPr id="31" name="Rounded Rectangle 30"/>
+          <p:cNvSpPr/>
+          <p:nvPr/>
+        </p:nvSpPr>
+        <p:spPr>
+          <a:xfrm>
+            <a:off x="8997696" y="5285232"/>
+            <a:ext cx="2615184" cy="841248"/>
+          </a:xfrm>
+          <a:prstGeom prst="roundRect">
+            <a:avLst/>
+          </a:prstGeom>
+          <a:solidFill>
+            <a:srgbClr val="3A332B"/>
+          </a:solidFill>
+          <a:ln>
+            <a:noFill/>
+          </a:ln>
+        </p:spPr>
+        <p:style>
+          <a:lnRef idx="1">
+            <a:schemeClr val="accent1"/>
+          </a:lnRef>
+          <a:fillRef idx="3">
+            <a:schemeClr val="accent1"/>
+          </a:fillRef>
+          <a:effectRef idx="2">
+            <a:schemeClr val="accent1"/>
+          </a:effectRef>
+          <a:fontRef idx="minor">
+            <a:schemeClr val="lt1"/>
+          </a:fontRef>
+        </p:style>
+        <p:txBody>
+          <a:bodyPr rtlCol="0" anchor="ctr"/>
+          <a:lstStyle/>
+          <a:p>
+            <a:pPr algn="ctr"/>
+            <a:endParaRPr/>
+          </a:p>
+        </p:txBody>
+      </p:sp>
+      <p:sp>
+        <p:nvSpPr>
+          <p:cNvPr id="32" name="TextBox 31"/>
+          <p:cNvSpPr txBox="1"/>
+          <p:nvPr/>
+        </p:nvSpPr>
+        <p:spPr>
+          <a:xfrm>
+            <a:off x="9162288" y="5349240"/>
+            <a:ext cx="2286000" cy="393192"/>
+          </a:xfrm>
+          <a:prstGeom prst="rect">
+            <a:avLst/>
+          </a:prstGeom>
+          <a:noFill/>
+        </p:spPr>
+        <p:txBody>
+          <a:bodyPr wrap="none" anchor="ctr">
+            <a:spAutoFit/>
+          </a:bodyPr>
+          <a:lstStyle/>
+          <a:p>
+            <a:pPr algn="ctr">
+              <a:spcBef>
+                <a:spcPts val="0"/>
+              </a:spcBef>
+              <a:spcAft>
+                <a:spcPts val="0"/>
+              </a:spcAft>
+            </a:pPr>
+            <a:r>
+              <a:rPr sz="2100" b="1">
+                <a:solidFill>
+                  <a:srgbClr val="E3BD62"/>
+                </a:solidFill>
+                <a:latin typeface="Bookman Old Style"/>
+              </a:rPr>
+              <a:t>201</a:t>
+            </a:r>
+          </a:p>
+        </p:txBody>
+      </p:sp>
+      <p:sp>
+        <p:nvSpPr>
+          <p:cNvPr id="33" name="TextBox 32"/>
+          <p:cNvSpPr txBox="1"/>
+          <p:nvPr/>
+        </p:nvSpPr>
+        <p:spPr>
+          <a:xfrm>
+            <a:off x="9107424" y="5760720"/>
+            <a:ext cx="2395728" cy="228600"/>
+          </a:xfrm>
+          <a:prstGeom prst="rect">
+            <a:avLst/>
+          </a:prstGeom>
+          <a:noFill/>
+        </p:spPr>
+        <p:txBody>
+          <a:bodyPr wrap="none" anchor="ctr">
+            <a:spAutoFit/>
+          </a:bodyPr>
+          <a:lstStyle/>
+          <a:p>
+            <a:pPr algn="ctr">
+              <a:spcBef>
+                <a:spcPts val="0"/>
+              </a:spcBef>
+              <a:spcAft>
+                <a:spcPts val="0"/>
+              </a:spcAft>
+            </a:pPr>
+            <a:r>
+              <a:rPr sz="1000">
+                <a:solidFill>
+                  <a:srgbClr val="F6F3EE"/>
+                </a:solidFill>
+                <a:latin typeface="Calibri"/>
+              </a:rPr>
+              <a:t>Total tests</a:t>
+            </a:r>
           </a:p>
         </p:txBody>
       </p:sp>
@@ -10091,7 +10361,7 @@
                 <a:ea typeface="Bookman Old Style" pitchFamily="34" charset="-122"/>
                 <a:cs typeface="Bookman Old Style" pitchFamily="34" charset="-120"/>
               </a:rPr>
-              <a:t>Lightweight SQLite schema updates</a:t>
+              <a:t>Safe Cross-Service Account Deletion</a:t>
             </a:r>
             <a:endParaRPr lang="en-US" sz="1600" dirty="0"/>
           </a:p>
@@ -10133,7 +10403,7 @@
                 <a:ea typeface="Calibri" pitchFamily="34" charset="-122"/>
                 <a:cs typeface="Calibri" pitchFamily="34" charset="-120"/>
               </a:rPr>
-              <a:t>Startup checks use ALTER TABLE to add specific missing columns to existing tables; there is no versioned migration framework or zero-downtime guarantee.</a:t>
+              <a:t>Inbox data is removed first. If the message service is unavailable, the account stays intact and deletion can be retried.</a:t>
             </a:r>
             <a:endParaRPr lang="en-US" sz="1250" dirty="0"/>
           </a:p>
@@ -10172,7 +10442,7 @@
                 <a:ea typeface="Calibri" pitchFamily="34" charset="-122"/>
                 <a:cs typeface="Calibri" pitchFamily="34" charset="-120"/>
               </a:rPr>
-              <a:t>7 / 8</a:t>
+              <a:t>7 / 9</a:t>
             </a:r>
             <a:endParaRPr lang="en-US" sz="1000" dirty="0"/>
           </a:p>
@@ -10228,12 +10498,19 @@
           <a:noFill/>
         </p:spPr>
         <p:txBody>
-          <a:bodyPr wrap="square" lIns="0" tIns="0" rIns="0" bIns="0" anchor="ctr">
+          <a:bodyPr wrap="square" lIns="0" tIns="0" rIns="0" bIns="0">
             <a:spAutoFit/>
           </a:bodyPr>
           <a:lstStyle/>
           <a:p>
-            <a:pPr algn="l"/>
+            <a:pPr algn="l">
+              <a:spcBef>
+                <a:spcPts val="0"/>
+              </a:spcBef>
+              <a:spcAft>
+                <a:spcPts val="0"/>
+              </a:spcAft>
+            </a:pPr>
             <a:r>
               <a:rPr sz="1200" b="1">
                 <a:solidFill>
@@ -10241,7 +10518,7 @@
                 </a:solidFill>
                 <a:latin typeface="Calibri"/>
               </a:rPr>
-              <a:t>TECHNICAL DETAILS</a:t>
+              <a:t>PRIVACY &amp; USER CONTROL</a:t>
             </a:r>
           </a:p>
         </p:txBody>
@@ -10255,28 +10532,35 @@
         <p:spPr>
           <a:xfrm>
             <a:off x="548640" y="685800"/>
-            <a:ext cx="11064240" cy="566928"/>
-          </a:xfrm>
-          <a:prstGeom prst="rect">
-            <a:avLst/>
-          </a:prstGeom>
-          <a:noFill/>
-        </p:spPr>
-        <p:txBody>
-          <a:bodyPr wrap="square" lIns="0" tIns="0" rIns="0" bIns="0" anchor="ctr">
+            <a:ext cx="11064240" cy="731520"/>
+          </a:xfrm>
+          <a:prstGeom prst="rect">
+            <a:avLst/>
+          </a:prstGeom>
+          <a:noFill/>
+        </p:spPr>
+        <p:txBody>
+          <a:bodyPr wrap="square" lIns="0" tIns="0" rIns="0" bIns="0">
             <a:spAutoFit/>
           </a:bodyPr>
           <a:lstStyle/>
           <a:p>
-            <a:pPr algn="l"/>
+            <a:pPr algn="l">
+              <a:spcBef>
+                <a:spcPts val="0"/>
+              </a:spcBef>
+              <a:spcAft>
+                <a:spcPts val="0"/>
+              </a:spcAft>
+            </a:pPr>
             <a:r>
-              <a:rPr sz="3000" b="0">
+              <a:rPr sz="3000" b="1">
                 <a:solidFill>
                   <a:srgbClr val="1C1A17"/>
                 </a:solidFill>
                 <a:latin typeface="Bookman Old Style"/>
               </a:rPr>
-              <a:t>API &amp; Data Contracts</a:t>
+              <a:t>Privacy by design, with clear boundaries</a:t>
             </a:r>
           </a:p>
         </p:txBody>
@@ -10289,21 +10573,28 @@
         </p:nvSpPr>
         <p:spPr>
           <a:xfrm>
-            <a:off x="548640" y="1307592"/>
-            <a:ext cx="10972800" cy="384048"/>
-          </a:xfrm>
-          <a:prstGeom prst="rect">
-            <a:avLst/>
-          </a:prstGeom>
-          <a:noFill/>
-        </p:spPr>
-        <p:txBody>
-          <a:bodyPr wrap="square" lIns="0" tIns="0" rIns="0" bIns="0" anchor="ctr">
+            <a:off x="548640" y="1389888"/>
+            <a:ext cx="10789920" cy="347472"/>
+          </a:xfrm>
+          <a:prstGeom prst="rect">
+            <a:avLst/>
+          </a:prstGeom>
+          <a:noFill/>
+        </p:spPr>
+        <p:txBody>
+          <a:bodyPr wrap="square" lIns="0" tIns="0" rIns="0" bIns="0">
             <a:spAutoFit/>
           </a:bodyPr>
           <a:lstStyle/>
           <a:p>
-            <a:pPr algn="l"/>
+            <a:pPr algn="l">
+              <a:spcBef>
+                <a:spcPts val="0"/>
+              </a:spcBef>
+              <a:spcAft>
+                <a:spcPts val="0"/>
+              </a:spcAft>
+            </a:pPr>
             <a:r>
               <a:rPr sz="1400" b="0">
                 <a:solidFill>
@@ -10311,7 +10602,7 @@
                 </a:solidFill>
                 <a:latin typeface="Calibri"/>
               </a:rPr>
-              <a:t>How shared invites, anonymous submissions, and private follow-up work end to end.</a:t>
+              <a:t>Owner access is protected; feedback stays anonymous to the owner.</a:t>
             </a:r>
           </a:p>
         </p:txBody>
@@ -10324,8 +10615,8 @@
         </p:nvSpPr>
         <p:spPr>
           <a:xfrm>
-            <a:off x="548640" y="1901952"/>
-            <a:ext cx="5376672" cy="1700784"/>
+            <a:off x="548640" y="1993392"/>
+            <a:ext cx="5376672" cy="1481328"/>
           </a:xfrm>
           <a:prstGeom prst="roundRect">
             <a:avLst/>
@@ -10368,21 +10659,28 @@
         </p:nvSpPr>
         <p:spPr>
           <a:xfrm>
-            <a:off x="777240" y="2066544"/>
-            <a:ext cx="4919472" cy="228600"/>
-          </a:xfrm>
-          <a:prstGeom prst="rect">
-            <a:avLst/>
-          </a:prstGeom>
-          <a:noFill/>
-        </p:spPr>
-        <p:txBody>
-          <a:bodyPr wrap="square" lIns="0" tIns="0" rIns="0" bIns="0" anchor="ctr">
+            <a:off x="804672" y="2194560"/>
+            <a:ext cx="4846320" cy="246888"/>
+          </a:xfrm>
+          <a:prstGeom prst="rect">
+            <a:avLst/>
+          </a:prstGeom>
+          <a:noFill/>
+        </p:spPr>
+        <p:txBody>
+          <a:bodyPr wrap="square" lIns="0" tIns="0" rIns="0" bIns="0">
             <a:spAutoFit/>
           </a:bodyPr>
           <a:lstStyle/>
           <a:p>
-            <a:pPr algn="l"/>
+            <a:pPr algn="l">
+              <a:spcBef>
+                <a:spcPts val="0"/>
+              </a:spcBef>
+              <a:spcAft>
+                <a:spcPts val="0"/>
+              </a:spcAft>
+            </a:pPr>
             <a:r>
               <a:rPr sz="1000" b="1">
                 <a:solidFill>
@@ -10390,7 +10688,7 @@
                 </a:solidFill>
                 <a:latin typeface="Calibri"/>
               </a:rPr>
-              <a:t>01  CREATE &amp; SHARE</a:t>
+              <a:t>OWNER ACCESS</a:t>
             </a:r>
           </a:p>
         </p:txBody>
@@ -10403,78 +10701,50 @@
         </p:nvSpPr>
         <p:spPr>
           <a:xfrm>
-            <a:off x="777240" y="2395728"/>
-            <a:ext cx="4919472" cy="347472"/>
-          </a:xfrm>
-          <a:prstGeom prst="rect">
-            <a:avLst/>
-          </a:prstGeom>
-          <a:noFill/>
-        </p:spPr>
-        <p:txBody>
-          <a:bodyPr wrap="square" lIns="0" tIns="0" rIns="0" bIns="0" anchor="ctr">
+            <a:off x="804672" y="2551176"/>
+            <a:ext cx="4828032" cy="749808"/>
+          </a:xfrm>
+          <a:prstGeom prst="rect">
+            <a:avLst/>
+          </a:prstGeom>
+          <a:noFill/>
+        </p:spPr>
+        <p:txBody>
+          <a:bodyPr wrap="square" lIns="0" tIns="0" rIns="0" bIns="0">
             <a:spAutoFit/>
           </a:bodyPr>
           <a:lstStyle/>
           <a:p>
-            <a:pPr algn="l"/>
+            <a:pPr algn="l">
+              <a:spcBef>
+                <a:spcPts val="0"/>
+              </a:spcBef>
+              <a:spcAft>
+                <a:spcPts val="0"/>
+              </a:spcAft>
+            </a:pPr>
             <a:r>
-              <a:rPr sz="1100" b="1">
+              <a:rPr sz="1300" b="0">
                 <a:solidFill>
                   <a:srgbClr val="1C1A17"/>
                 </a:solidFill>
-                <a:latin typeface="Consolas"/>
-              </a:rPr>
-              <a:t>POST  /invites/{user_id}</a:t>
-            </a:r>
-          </a:p>
-        </p:txBody>
-      </p:sp>
-      <p:sp>
-        <p:nvSpPr>
-          <p:cNvPr id="8" name="TextBox 7"/>
-          <p:cNvSpPr txBox="1"/>
-          <p:nvPr/>
-        </p:nvSpPr>
-        <p:spPr>
-          <a:xfrm>
-            <a:off x="777240" y="2770632"/>
-            <a:ext cx="4919472" cy="667512"/>
-          </a:xfrm>
-          <a:prstGeom prst="rect">
-            <a:avLst/>
-          </a:prstGeom>
-          <a:noFill/>
-        </p:spPr>
-        <p:txBody>
-          <a:bodyPr wrap="square" lIns="0" tIns="0" rIns="0" bIns="0" anchor="t">
-            <a:spAutoFit/>
-          </a:bodyPr>
-          <a:lstStyle/>
-          <a:p>
-            <a:pPr algn="l"/>
-            <a:r>
-              <a:rPr sz="1200" b="0">
-                <a:solidFill>
-                  <a:srgbClr val="6B655C"/>
-                </a:solidFill>
                 <a:latin typeface="Calibri"/>
               </a:rPr>
-              <a:t>Returns one invite token for the inbox. The same link is reusable by multiple people while the inbox accepts messages.</a:t>
+              <a:t>Passwords are stored as salted PBKDF2 hashes. Dashboard APIs require a signed, short-lived owner token.</a:t>
             </a:r>
           </a:p>
         </p:txBody>
       </p:sp>
       <p:sp>
         <p:nvSpPr>
-          <p:cNvPr id="9" name="Rounded Rectangle 8"/>
+          <p:cNvPr id="8" name="Rounded Rectangle 7"/>
           <p:cNvSpPr/>
           <p:nvPr/>
         </p:nvSpPr>
         <p:spPr>
           <a:xfrm>
-            <a:off x="6263640" y="1901952"/>
-            <a:ext cx="5376672" cy="1700784"/>
+            <a:off x="6263640" y="1993392"/>
+            <a:ext cx="5376672" cy="1481328"/>
           </a:xfrm>
           <a:prstGeom prst="roundRect">
             <a:avLst/>
@@ -10511,119 +10781,98 @@
       </p:sp>
       <p:sp>
         <p:nvSpPr>
-          <p:cNvPr id="10" name="TextBox 9"/>
-          <p:cNvSpPr txBox="1"/>
-          <p:nvPr/>
-        </p:nvSpPr>
-        <p:spPr>
-          <a:xfrm>
-            <a:off x="6492240" y="2066544"/>
-            <a:ext cx="4919472" cy="228600"/>
-          </a:xfrm>
-          <a:prstGeom prst="rect">
-            <a:avLst/>
-          </a:prstGeom>
-          <a:noFill/>
-        </p:spPr>
-        <p:txBody>
-          <a:bodyPr wrap="square" lIns="0" tIns="0" rIns="0" bIns="0" anchor="ctr">
+          <p:cNvPr id="9" name="TextBox 8"/>
+          <p:cNvSpPr txBox="1"/>
+          <p:nvPr/>
+        </p:nvSpPr>
+        <p:spPr>
+          <a:xfrm>
+            <a:off x="6519672" y="2194560"/>
+            <a:ext cx="4846320" cy="246888"/>
+          </a:xfrm>
+          <a:prstGeom prst="rect">
+            <a:avLst/>
+          </a:prstGeom>
+          <a:noFill/>
+        </p:spPr>
+        <p:txBody>
+          <a:bodyPr wrap="square" lIns="0" tIns="0" rIns="0" bIns="0">
             <a:spAutoFit/>
           </a:bodyPr>
           <a:lstStyle/>
           <a:p>
-            <a:pPr algn="l"/>
+            <a:pPr algn="l">
+              <a:spcBef>
+                <a:spcPts val="0"/>
+              </a:spcBef>
+              <a:spcAft>
+                <a:spcPts val="0"/>
+              </a:spcAft>
+            </a:pPr>
             <a:r>
               <a:rPr sz="1000" b="1">
                 <a:solidFill>
-                  <a:srgbClr val="2F6F6B"/>
+                  <a:srgbClr val="C75D3C"/>
                 </a:solidFill>
                 <a:latin typeface="Calibri"/>
               </a:rPr>
-              <a:t>02  SUBMIT ANONYMOUSLY</a:t>
+              <a:t>ANONYMOUS SENDING</a:t>
             </a:r>
           </a:p>
         </p:txBody>
       </p:sp>
       <p:sp>
         <p:nvSpPr>
-          <p:cNvPr id="11" name="TextBox 10"/>
-          <p:cNvSpPr txBox="1"/>
-          <p:nvPr/>
-        </p:nvSpPr>
-        <p:spPr>
-          <a:xfrm>
-            <a:off x="6492240" y="2395728"/>
-            <a:ext cx="4919472" cy="347472"/>
-          </a:xfrm>
-          <a:prstGeom prst="rect">
-            <a:avLst/>
-          </a:prstGeom>
-          <a:noFill/>
-        </p:spPr>
-        <p:txBody>
-          <a:bodyPr wrap="square" lIns="0" tIns="0" rIns="0" bIns="0" anchor="ctr">
+          <p:cNvPr id="10" name="TextBox 9"/>
+          <p:cNvSpPr txBox="1"/>
+          <p:nvPr/>
+        </p:nvSpPr>
+        <p:spPr>
+          <a:xfrm>
+            <a:off x="6519672" y="2551176"/>
+            <a:ext cx="4828032" cy="749808"/>
+          </a:xfrm>
+          <a:prstGeom prst="rect">
+            <a:avLst/>
+          </a:prstGeom>
+          <a:noFill/>
+        </p:spPr>
+        <p:txBody>
+          <a:bodyPr wrap="square" lIns="0" tIns="0" rIns="0" bIns="0">
             <a:spAutoFit/>
           </a:bodyPr>
           <a:lstStyle/>
           <a:p>
-            <a:pPr algn="l"/>
+            <a:pPr algn="l">
+              <a:spcBef>
+                <a:spcPts val="0"/>
+              </a:spcBef>
+              <a:spcAft>
+                <a:spcPts val="0"/>
+              </a:spcAft>
+            </a:pPr>
             <a:r>
-              <a:rPr sz="1100" b="1">
+              <a:rPr sz="1300" b="0">
                 <a:solidFill>
                   <a:srgbClr val="1C1A17"/>
                 </a:solidFill>
-                <a:latin typeface="Consolas"/>
-              </a:rPr>
-              <a:t>POST  /messages/invite/{invite_token}</a:t>
-            </a:r>
-          </a:p>
-        </p:txBody>
-      </p:sp>
-      <p:sp>
-        <p:nvSpPr>
-          <p:cNvPr id="12" name="TextBox 11"/>
-          <p:cNvSpPr txBox="1"/>
-          <p:nvPr/>
-        </p:nvSpPr>
-        <p:spPr>
-          <a:xfrm>
-            <a:off x="6492240" y="2770632"/>
-            <a:ext cx="4919472" cy="667512"/>
-          </a:xfrm>
-          <a:prstGeom prst="rect">
-            <a:avLst/>
-          </a:prstGeom>
-          <a:noFill/>
-        </p:spPr>
-        <p:txBody>
-          <a:bodyPr wrap="square" lIns="0" tIns="0" rIns="0" bIns="0" anchor="t">
-            <a:spAutoFit/>
-          </a:bodyPr>
-          <a:lstStyle/>
-          <a:p>
-            <a:pPr algn="l"/>
-            <a:r>
-              <a:rPr sz="1200" b="0">
-                <a:solidFill>
-                  <a:srgbClr val="6B655C"/>
-                </a:solidFill>
                 <a:latin typeface="Calibri"/>
               </a:rPr>
-              <a:t>Accepts message content and an optional category. Returns a unique reply token for this sender.</a:t>
+              <a:t>A shared invite accepts feedback without asking senders to create an account or provide their name.</a:t>
             </a:r>
           </a:p>
         </p:txBody>
       </p:sp>
       <p:sp>
         <p:nvSpPr>
-          <p:cNvPr id="13" name="Rounded Rectangle 12"/>
+          <p:cNvPr id="11" name="Rounded Rectangle 10"/>
           <p:cNvSpPr/>
           <p:nvPr/>
         </p:nvSpPr>
         <p:spPr>
           <a:xfrm>
-            <a:off x="548640" y="3840480"/>
-            <a:ext cx="5376672" cy="1700784"/>
+            <a:off x="548640" y="3767328"/>
+            <a:ext cx="5376672" cy="1481328"/>
           </a:xfrm>
           <a:prstGeom prst="roundRect">
             <a:avLst/>
@@ -10660,119 +10909,98 @@
       </p:sp>
       <p:sp>
         <p:nvSpPr>
-          <p:cNvPr id="14" name="TextBox 13"/>
-          <p:cNvSpPr txBox="1"/>
-          <p:nvPr/>
-        </p:nvSpPr>
-        <p:spPr>
-          <a:xfrm>
-            <a:off x="777240" y="4005072"/>
-            <a:ext cx="4919472" cy="228600"/>
-          </a:xfrm>
-          <a:prstGeom prst="rect">
-            <a:avLst/>
-          </a:prstGeom>
-          <a:noFill/>
-        </p:spPr>
-        <p:txBody>
-          <a:bodyPr wrap="square" lIns="0" tIns="0" rIns="0" bIns="0" anchor="ctr">
+          <p:cNvPr id="12" name="TextBox 11"/>
+          <p:cNvSpPr txBox="1"/>
+          <p:nvPr/>
+        </p:nvSpPr>
+        <p:spPr>
+          <a:xfrm>
+            <a:off x="804672" y="3968496"/>
+            <a:ext cx="4846320" cy="246888"/>
+          </a:xfrm>
+          <a:prstGeom prst="rect">
+            <a:avLst/>
+          </a:prstGeom>
+          <a:noFill/>
+        </p:spPr>
+        <p:txBody>
+          <a:bodyPr wrap="square" lIns="0" tIns="0" rIns="0" bIns="0">
             <a:spAutoFit/>
           </a:bodyPr>
           <a:lstStyle/>
           <a:p>
-            <a:pPr algn="l"/>
+            <a:pPr algn="l">
+              <a:spcBef>
+                <a:spcPts val="0"/>
+              </a:spcBef>
+              <a:spcAft>
+                <a:spcPts val="0"/>
+              </a:spcAft>
+            </a:pPr>
             <a:r>
               <a:rPr sz="1000" b="1">
                 <a:solidFill>
-                  <a:srgbClr val="2F6F6B"/>
+                  <a:srgbClr val="C75D3C"/>
                 </a:solidFill>
                 <a:latin typeface="Calibri"/>
               </a:rPr>
-              <a:t>03  CHECK FOR A REPLY</a:t>
+              <a:t>OWNER CONTROL</a:t>
             </a:r>
           </a:p>
         </p:txBody>
       </p:sp>
       <p:sp>
         <p:nvSpPr>
-          <p:cNvPr id="15" name="TextBox 14"/>
-          <p:cNvSpPr txBox="1"/>
-          <p:nvPr/>
-        </p:nvSpPr>
-        <p:spPr>
-          <a:xfrm>
-            <a:off x="777240" y="4334256"/>
-            <a:ext cx="4919472" cy="347472"/>
-          </a:xfrm>
-          <a:prstGeom prst="rect">
-            <a:avLst/>
-          </a:prstGeom>
-          <a:noFill/>
-        </p:spPr>
-        <p:txBody>
-          <a:bodyPr wrap="square" lIns="0" tIns="0" rIns="0" bIns="0" anchor="ctr">
+          <p:cNvPr id="13" name="TextBox 12"/>
+          <p:cNvSpPr txBox="1"/>
+          <p:nvPr/>
+        </p:nvSpPr>
+        <p:spPr>
+          <a:xfrm>
+            <a:off x="804672" y="4325112"/>
+            <a:ext cx="4828032" cy="749808"/>
+          </a:xfrm>
+          <a:prstGeom prst="rect">
+            <a:avLst/>
+          </a:prstGeom>
+          <a:noFill/>
+        </p:spPr>
+        <p:txBody>
+          <a:bodyPr wrap="square" lIns="0" tIns="0" rIns="0" bIns="0">
             <a:spAutoFit/>
           </a:bodyPr>
           <a:lstStyle/>
           <a:p>
-            <a:pPr algn="l"/>
+            <a:pPr algn="l">
+              <a:spcBef>
+                <a:spcPts val="0"/>
+              </a:spcBef>
+              <a:spcAft>
+                <a:spcPts val="0"/>
+              </a:spcAft>
+            </a:pPr>
             <a:r>
-              <a:rPr sz="1100" b="1">
+              <a:rPr sz="1300" b="0">
                 <a:solidFill>
                   <a:srgbClr val="1C1A17"/>
                 </a:solidFill>
-                <a:latin typeface="Consolas"/>
-              </a:rPr>
-              <a:t>GET  /messages/token/{reply_token}</a:t>
-            </a:r>
-          </a:p>
-        </p:txBody>
-      </p:sp>
-      <p:sp>
-        <p:nvSpPr>
-          <p:cNvPr id="16" name="TextBox 15"/>
-          <p:cNvSpPr txBox="1"/>
-          <p:nvPr/>
-        </p:nvSpPr>
-        <p:spPr>
-          <a:xfrm>
-            <a:off x="777240" y="4709160"/>
-            <a:ext cx="4919472" cy="667512"/>
-          </a:xfrm>
-          <a:prstGeom prst="rect">
-            <a:avLst/>
-          </a:prstGeom>
-          <a:noFill/>
-        </p:spPr>
-        <p:txBody>
-          <a:bodyPr wrap="square" lIns="0" tIns="0" rIns="0" bIns="0" anchor="t">
-            <a:spAutoFit/>
-          </a:bodyPr>
-          <a:lstStyle/>
-          <a:p>
-            <a:pPr algn="l"/>
-            <a:r>
-              <a:rPr sz="1200" b="0">
-                <a:solidFill>
-                  <a:srgbClr val="6B655C"/>
-                </a:solidFill>
                 <a:latin typeface="Calibri"/>
               </a:rPr>
-              <a:t>Returns the sender’s message, reaction, and reply without exposing the inbox owner ID. The page refreshes every 5 seconds; its private URL can be copied to return later.</a:t>
+              <a:t>Pause incoming feedback, rotate the invite to invalidate its predecessor, or manage and remove messages.</a:t>
             </a:r>
           </a:p>
         </p:txBody>
       </p:sp>
       <p:sp>
         <p:nvSpPr>
-          <p:cNvPr id="17" name="Rounded Rectangle 16"/>
+          <p:cNvPr id="14" name="Rounded Rectangle 13"/>
           <p:cNvSpPr/>
           <p:nvPr/>
         </p:nvSpPr>
         <p:spPr>
           <a:xfrm>
-            <a:off x="6263640" y="3840480"/>
-            <a:ext cx="5376672" cy="1700784"/>
+            <a:off x="6263640" y="3767328"/>
+            <a:ext cx="5376672" cy="1481328"/>
           </a:xfrm>
           <a:prstGeom prst="roundRect">
             <a:avLst/>
@@ -10809,27 +11037,34 @@
       </p:sp>
       <p:sp>
         <p:nvSpPr>
-          <p:cNvPr id="18" name="TextBox 17"/>
-          <p:cNvSpPr txBox="1"/>
-          <p:nvPr/>
-        </p:nvSpPr>
-        <p:spPr>
-          <a:xfrm>
-            <a:off x="6492240" y="4005072"/>
-            <a:ext cx="4919472" cy="228600"/>
-          </a:xfrm>
-          <a:prstGeom prst="rect">
-            <a:avLst/>
-          </a:prstGeom>
-          <a:noFill/>
-        </p:spPr>
-        <p:txBody>
-          <a:bodyPr wrap="square" lIns="0" tIns="0" rIns="0" bIns="0" anchor="ctr">
+          <p:cNvPr id="15" name="TextBox 14"/>
+          <p:cNvSpPr txBox="1"/>
+          <p:nvPr/>
+        </p:nvSpPr>
+        <p:spPr>
+          <a:xfrm>
+            <a:off x="6519672" y="3968496"/>
+            <a:ext cx="4846320" cy="246888"/>
+          </a:xfrm>
+          <a:prstGeom prst="rect">
+            <a:avLst/>
+          </a:prstGeom>
+          <a:noFill/>
+        </p:spPr>
+        <p:txBody>
+          <a:bodyPr wrap="square" lIns="0" tIns="0" rIns="0" bIns="0">
             <a:spAutoFit/>
           </a:bodyPr>
           <a:lstStyle/>
           <a:p>
-            <a:pPr algn="l"/>
+            <a:pPr algn="l">
+              <a:spcBef>
+                <a:spcPts val="0"/>
+              </a:spcBef>
+              <a:spcAft>
+                <a:spcPts val="0"/>
+              </a:spcAft>
+            </a:pPr>
             <a:r>
               <a:rPr sz="1000" b="1">
                 <a:solidFill>
@@ -10837,91 +11072,63 @@
                 </a:solidFill>
                 <a:latin typeface="Calibri"/>
               </a:rPr>
-              <a:t>04  OWNER INBOX</a:t>
+              <a:t>ACCOUNT DELETION</a:t>
             </a:r>
           </a:p>
         </p:txBody>
       </p:sp>
       <p:sp>
         <p:nvSpPr>
-          <p:cNvPr id="19" name="TextBox 18"/>
-          <p:cNvSpPr txBox="1"/>
-          <p:nvPr/>
-        </p:nvSpPr>
-        <p:spPr>
-          <a:xfrm>
-            <a:off x="6492240" y="4334256"/>
-            <a:ext cx="4919472" cy="347472"/>
-          </a:xfrm>
-          <a:prstGeom prst="rect">
-            <a:avLst/>
-          </a:prstGeom>
-          <a:noFill/>
-        </p:spPr>
-        <p:txBody>
-          <a:bodyPr wrap="square" lIns="0" tIns="0" rIns="0" bIns="0" anchor="ctr">
+          <p:cNvPr id="16" name="TextBox 15"/>
+          <p:cNvSpPr txBox="1"/>
+          <p:nvPr/>
+        </p:nvSpPr>
+        <p:spPr>
+          <a:xfrm>
+            <a:off x="6519672" y="4325112"/>
+            <a:ext cx="4828032" cy="749808"/>
+          </a:xfrm>
+          <a:prstGeom prst="rect">
+            <a:avLst/>
+          </a:prstGeom>
+          <a:noFill/>
+        </p:spPr>
+        <p:txBody>
+          <a:bodyPr wrap="square" lIns="0" tIns="0" rIns="0" bIns="0">
             <a:spAutoFit/>
           </a:bodyPr>
           <a:lstStyle/>
           <a:p>
-            <a:pPr algn="l"/>
+            <a:pPr algn="l">
+              <a:spcBef>
+                <a:spcPts val="0"/>
+              </a:spcBef>
+              <a:spcAft>
+                <a:spcPts val="0"/>
+              </a:spcAft>
+            </a:pPr>
             <a:r>
-              <a:rPr sz="1050" b="1">
+              <a:rPr sz="1300" b="0">
                 <a:solidFill>
                   <a:srgbClr val="1C1A17"/>
                 </a:solidFill>
-                <a:latin typeface="Consolas"/>
-              </a:rPr>
-              <a:t>GET  /messages/{user_id}?status=active</a:t>
-            </a:r>
-          </a:p>
-        </p:txBody>
-      </p:sp>
-      <p:sp>
-        <p:nvSpPr>
-          <p:cNvPr id="20" name="TextBox 19"/>
-          <p:cNvSpPr txBox="1"/>
-          <p:nvPr/>
-        </p:nvSpPr>
-        <p:spPr>
-          <a:xfrm>
-            <a:off x="6492240" y="4709160"/>
-            <a:ext cx="4919472" cy="667512"/>
-          </a:xfrm>
-          <a:prstGeom prst="rect">
-            <a:avLst/>
-          </a:prstGeom>
-          <a:noFill/>
-        </p:spPr>
-        <p:txBody>
-          <a:bodyPr wrap="square" lIns="0" tIns="0" rIns="0" bIns="0" anchor="t">
-            <a:spAutoFit/>
-          </a:bodyPr>
-          <a:lstStyle/>
-          <a:p>
-            <a:pPr algn="l"/>
-            <a:r>
-              <a:rPr sz="1200" b="0">
-                <a:solidFill>
-                  <a:srgbClr val="6B655C"/>
-                </a:solidFill>
                 <a:latin typeface="Calibri"/>
               </a:rPr>
-              <a:t>Status filters: active, archived, reported. PATCH manages replies, reactions, reports, and archive/restore; DELETE permanently removes a message.</a:t>
+              <a:t>A confirmed deletion removes messages and invites before deleting the account. If cleanup fails, the account remains retryable.</a:t>
             </a:r>
           </a:p>
         </p:txBody>
       </p:sp>
       <p:sp>
         <p:nvSpPr>
-          <p:cNvPr id="21" name="Rounded Rectangle 20"/>
+          <p:cNvPr id="17" name="Rounded Rectangle 16"/>
           <p:cNvSpPr/>
           <p:nvPr/>
         </p:nvSpPr>
         <p:spPr>
           <a:xfrm>
-            <a:off x="548640" y="5742432"/>
-            <a:ext cx="11064240" cy="438912"/>
+            <a:off x="548640" y="5559552"/>
+            <a:ext cx="11064240" cy="530352"/>
           </a:xfrm>
           <a:prstGeom prst="roundRect">
             <a:avLst/>
@@ -10958,97 +11165,76 @@
       </p:sp>
       <p:sp>
         <p:nvSpPr>
-          <p:cNvPr id="22" name="TextBox 21"/>
-          <p:cNvSpPr txBox="1"/>
-          <p:nvPr/>
-        </p:nvSpPr>
-        <p:spPr>
-          <a:xfrm>
-            <a:off x="749808" y="5760720"/>
-            <a:ext cx="1051560" cy="384048"/>
-          </a:xfrm>
-          <a:prstGeom prst="rect">
-            <a:avLst/>
-          </a:prstGeom>
-          <a:noFill/>
-        </p:spPr>
-        <p:txBody>
-          <a:bodyPr wrap="square" lIns="0" tIns="0" rIns="0" bIns="0" anchor="ctr">
+          <p:cNvPr id="18" name="TextBox 17"/>
+          <p:cNvSpPr txBox="1"/>
+          <p:nvPr/>
+        </p:nvSpPr>
+        <p:spPr>
+          <a:xfrm>
+            <a:off x="758952" y="5660136"/>
+            <a:ext cx="10652760" cy="292608"/>
+          </a:xfrm>
+          <a:prstGeom prst="rect">
+            <a:avLst/>
+          </a:prstGeom>
+          <a:noFill/>
+        </p:spPr>
+        <p:txBody>
+          <a:bodyPr wrap="square" lIns="0" tIns="0" rIns="0" bIns="0">
             <a:spAutoFit/>
           </a:bodyPr>
           <a:lstStyle/>
           <a:p>
-            <a:pPr algn="l"/>
+            <a:pPr algn="l">
+              <a:spcBef>
+                <a:spcPts val="0"/>
+              </a:spcBef>
+              <a:spcAft>
+                <a:spcPts val="0"/>
+              </a:spcAft>
+            </a:pPr>
             <a:r>
-              <a:rPr sz="950" b="1">
+              <a:rPr sz="1100" b="0">
                 <a:solidFill>
-                  <a:srgbClr val="E8A07F"/>
+                  <a:srgbClr val="F6F3EE"/>
                 </a:solidFill>
                 <a:latin typeface="Calibri"/>
               </a:rPr>
-              <a:t>BOUNDARIES</a:t>
+              <a:t>LOCAL-ONLY BOUNDARY   Invite and reply-check URLs are bearer links: anyone holding a link can use its intended capability.</a:t>
             </a:r>
           </a:p>
         </p:txBody>
       </p:sp>
       <p:sp>
         <p:nvSpPr>
-          <p:cNvPr id="23" name="TextBox 22"/>
-          <p:cNvSpPr txBox="1"/>
-          <p:nvPr/>
-        </p:nvSpPr>
-        <p:spPr>
-          <a:xfrm>
-            <a:off x="1828800" y="5760720"/>
-            <a:ext cx="9509760" cy="384048"/>
-          </a:xfrm>
-          <a:prstGeom prst="rect">
-            <a:avLst/>
-          </a:prstGeom>
-          <a:noFill/>
-        </p:spPr>
-        <p:txBody>
-          <a:bodyPr wrap="square" lIns="0" tIns="0" rIns="0" bIns="0" anchor="ctr">
+          <p:cNvPr id="19" name="TextBox 18"/>
+          <p:cNvSpPr txBox="1"/>
+          <p:nvPr/>
+        </p:nvSpPr>
+        <p:spPr>
+          <a:xfrm>
+            <a:off x="10881360" y="6492240"/>
+            <a:ext cx="914400" cy="274320"/>
+          </a:xfrm>
+          <a:prstGeom prst="rect">
+            <a:avLst/>
+          </a:prstGeom>
+          <a:noFill/>
+        </p:spPr>
+        <p:txBody>
+          <a:bodyPr wrap="square" lIns="0" tIns="0" rIns="0" bIns="0">
             <a:spAutoFit/>
           </a:bodyPr>
           <a:lstStyle/>
           <a:p>
-            <a:pPr algn="l"/>
-            <a:r>
-              <a:rPr sz="1100" b="0">
-                <a:solidFill>
-                  <a:srgbClr val="FFFFFF"/>
-                </a:solidFill>
-                <a:latin typeface="Calibri"/>
-              </a:rPr>
-              <a:t>SQLite per service · Message limit: 500 characters · Public invite URLs require deployment</a:t>
-            </a:r>
-          </a:p>
-        </p:txBody>
-      </p:sp>
-      <p:sp>
-        <p:nvSpPr>
-          <p:cNvPr id="24" name="TextBox 23"/>
-          <p:cNvSpPr txBox="1"/>
-          <p:nvPr/>
-        </p:nvSpPr>
-        <p:spPr>
-          <a:xfrm>
-            <a:off x="10881360" y="6492240"/>
-            <a:ext cx="914400" cy="274320"/>
-          </a:xfrm>
-          <a:prstGeom prst="rect">
-            <a:avLst/>
-          </a:prstGeom>
-          <a:noFill/>
-        </p:spPr>
-        <p:txBody>
-          <a:bodyPr wrap="square" lIns="0" tIns="0" rIns="0" bIns="0" anchor="ctr">
-            <a:spAutoFit/>
-          </a:bodyPr>
-          <a:lstStyle/>
-          <a:p>
-            <a:pPr algn="r"/>
+            <a:pPr algn="r">
+              <a:spcBef>
+                <a:spcPts val="0"/>
+              </a:spcBef>
+              <a:spcAft>
+                <a:spcPts val="0"/>
+              </a:spcAft>
+            </a:pPr>
             <a:r>
               <a:rPr sz="1000" b="0">
                 <a:solidFill>
@@ -11056,7 +11242,7 @@
                 </a:solidFill>
                 <a:latin typeface="Calibri"/>
               </a:rPr>
-              <a:t>8 / 8</a:t>
+              <a:t>9 / 9</a:t>
             </a:r>
           </a:p>
         </p:txBody>
